--- a/assets/TCS349/Unit-2/Lecture8_Data_Protection_Techniques.pptx
+++ b/assets/TCS349/Unit-2/Lecture8_Data_Protection_Techniques.pptx
@@ -4,6 +4,9 @@
   <p:sldMasterIdLst>
     <p:sldMasterId id="2147483648" r:id="rId1"/>
   </p:sldMasterIdLst>
+  <p:notesMasterIdLst>
+    <p:notesMasterId r:id="rId13"/>
+  </p:notesMasterIdLst>
   <p:sldIdLst>
     <p:sldId id="256" r:id="rId2"/>
     <p:sldId id="257" r:id="rId3"/>
@@ -17,9 +20,6 @@
     <p:sldId id="265" r:id="rId11"/>
     <p:sldId id="266" r:id="rId12"/>
   </p:sldIdLst>
-  <p:notesMasterIdLst>
-    <p:notesMasterId r:id="rId13"/>
-  </p:notesMasterIdLst>
   <p:sldSz cx="12192000" cy="6858000"/>
   <p:notesSz cx="6858000" cy="12192000"/>
   <p:defaultTextStyle>
@@ -114,6 +114,11 @@
       </a:defRPr>
     </a:lvl9pPr>
   </p:defaultTextStyle>
+  <p:extLst>
+    <p:ext uri="{EFAFB233-063F-42B5-8137-9DF3F51BA10A}">
+      <p15:sldGuideLst xmlns:p15="http://schemas.microsoft.com/office/powerpoint/2012/main"/>
+    </p:ext>
+  </p:extLst>
 </p:presentation>
 </file>
 
@@ -139,234 +144,10 @@
           <a:chExt cx="0" cy="0"/>
         </a:xfrm>
       </p:grpSpPr>
-      <p:sp>
-        <p:nvSpPr>
-          <p:cNvPr id="2" name="Header Placeholder 1"/>
-          <p:cNvSpPr>
-            <a:spLocks noGrp="1"/>
-          </p:cNvSpPr>
-          <p:nvPr>
-            <p:ph type="hdr" sz="quarter"/>
-          </p:nvPr>
-        </p:nvSpPr>
-        <p:spPr>
-          <a:xfrm>
-            <a:off x="0" y="0"/>
-            <a:ext cx="2971800" cy="458788"/>
-          </a:xfrm>
-          <a:prstGeom prst="rect">
-            <a:avLst/>
-          </a:prstGeom>
-        </p:spPr>
-        <p:txBody>
-          <a:bodyPr vert="horz" lIns="91440" tIns="45720" rIns="91440" bIns="45720" rtlCol="0"/>
-          <a:lstStyle>
-            <a:lvl1pPr algn="l">
-              <a:defRPr sz="1200"/>
-            </a:lvl1pPr>
-          </a:lstStyle>
-          <a:p>
-            <a:endParaRPr lang="en-US"/>
-          </a:p>
-        </p:txBody>
-      </p:sp>
-      <p:sp>
-        <p:nvSpPr>
-          <p:cNvPr id="3" name="Date Placeholder 2"/>
-          <p:cNvSpPr>
-            <a:spLocks noGrp="1"/>
-          </p:cNvSpPr>
-          <p:nvPr>
-            <p:ph type="dt" idx="1"/>
-          </p:nvPr>
-        </p:nvSpPr>
-        <p:spPr>
-          <a:xfrm>
-            <a:off x="3884613" y="0"/>
-            <a:ext cx="2971800" cy="458788"/>
-          </a:xfrm>
-          <a:prstGeom prst="rect">
-            <a:avLst/>
-          </a:prstGeom>
-        </p:spPr>
-        <p:txBody>
-          <a:bodyPr vert="horz" lIns="91440" tIns="45720" rIns="91440" bIns="45720" rtlCol="0"/>
-          <a:lstStyle>
-            <a:lvl1pPr algn="r">
-              <a:defRPr sz="1200"/>
-            </a:lvl1pPr>
-          </a:lstStyle>
-          <a:p>
-            <a:fld id="{5282F153-3F37-0F45-9E97-73ACFA13230C}" type="datetimeFigureOut">
-              <a:rPr lang="en-US"/>
-              <a:t>7/23/19</a:t>
-            </a:fld>
-            <a:endParaRPr lang="en-US"/>
-          </a:p>
-        </p:txBody>
-      </p:sp>
-      <p:sp>
-        <p:nvSpPr>
-          <p:cNvPr id="4" name="Slide Image Placeholder 3"/>
-          <p:cNvSpPr>
-            <a:spLocks noGrp="1" noRot="1" noChangeAspect="1"/>
-          </p:cNvSpPr>
-          <p:nvPr>
-            <p:ph type="sldImg" idx="2"/>
-          </p:nvPr>
-        </p:nvSpPr>
-        <p:spPr>
-          <a:xfrm>
-            <a:off x="685800" y="1143000"/>
-            <a:ext cx="5486400" cy="3086100"/>
-          </a:xfrm>
-          <a:prstGeom prst="rect">
-            <a:avLst/>
-          </a:prstGeom>
-          <a:noFill/>
-          <a:ln w="12700">
-            <a:solidFill>
-              <a:prstClr val="black"/>
-            </a:solidFill>
-          </a:ln>
-        </p:spPr>
-        <p:txBody>
-          <a:bodyPr vert="horz" lIns="91440" tIns="45720" rIns="91440" bIns="45720" rtlCol="0" anchor="ctr"/>
-          <a:lstStyle/>
-          <a:p>
-            <a:endParaRPr lang="en-US"/>
-          </a:p>
-        </p:txBody>
-      </p:sp>
-      <p:sp>
-        <p:nvSpPr>
-          <p:cNvPr id="5" name="Notes Placeholder 4"/>
-          <p:cNvSpPr>
-            <a:spLocks noGrp="1"/>
-          </p:cNvSpPr>
-          <p:nvPr>
-            <p:ph type="body" sz="quarter" idx="3"/>
-          </p:nvPr>
-        </p:nvSpPr>
-        <p:spPr>
-          <a:xfrm>
-            <a:off x="685800" y="4400550"/>
-            <a:ext cx="5486400" cy="3600450"/>
-          </a:xfrm>
-          <a:prstGeom prst="rect">
-            <a:avLst/>
-          </a:prstGeom>
-        </p:spPr>
-        <p:txBody>
-          <a:bodyPr vert="horz" lIns="91440" tIns="45720" rIns="91440" bIns="45720" rtlCol="0"/>
-          <a:lstStyle/>
-          <a:p>
-            <a:pPr lvl="0"/>
-            <a:r>
-              <a:rPr lang="en-US"/>
-              <a:t>Click to edit Master text styles</a:t>
-            </a:r>
-          </a:p>
-          <a:p>
-            <a:pPr lvl="1"/>
-            <a:r>
-              <a:rPr lang="en-US"/>
-              <a:t>Second level</a:t>
-            </a:r>
-          </a:p>
-          <a:p>
-            <a:pPr lvl="2"/>
-            <a:r>
-              <a:rPr lang="en-US"/>
-              <a:t>Third level</a:t>
-            </a:r>
-          </a:p>
-          <a:p>
-            <a:pPr lvl="3"/>
-            <a:r>
-              <a:rPr lang="en-US"/>
-              <a:t>Fourth level</a:t>
-            </a:r>
-          </a:p>
-          <a:p>
-            <a:pPr lvl="4"/>
-            <a:r>
-              <a:rPr lang="en-US"/>
-              <a:t>Fifth level</a:t>
-            </a:r>
-          </a:p>
-        </p:txBody>
-      </p:sp>
-      <p:sp>
-        <p:nvSpPr>
-          <p:cNvPr id="6" name="Footer Placeholder 5"/>
-          <p:cNvSpPr>
-            <a:spLocks noGrp="1"/>
-          </p:cNvSpPr>
-          <p:nvPr>
-            <p:ph type="ftr" sz="quarter" idx="4"/>
-          </p:nvPr>
-        </p:nvSpPr>
-        <p:spPr>
-          <a:xfrm>
-            <a:off x="0" y="8685213"/>
-            <a:ext cx="2971800" cy="458787"/>
-          </a:xfrm>
-          <a:prstGeom prst="rect">
-            <a:avLst/>
-          </a:prstGeom>
-        </p:spPr>
-        <p:txBody>
-          <a:bodyPr vert="horz" lIns="91440" tIns="45720" rIns="91440" bIns="45720" rtlCol="0" anchor="b"/>
-          <a:lstStyle>
-            <a:lvl1pPr algn="l">
-              <a:defRPr sz="1200"/>
-            </a:lvl1pPr>
-          </a:lstStyle>
-          <a:p>
-            <a:endParaRPr lang="en-US"/>
-          </a:p>
-        </p:txBody>
-      </p:sp>
-      <p:sp>
-        <p:nvSpPr>
-          <p:cNvPr id="7" name="Slide Number Placeholder 6"/>
-          <p:cNvSpPr>
-            <a:spLocks noGrp="1"/>
-          </p:cNvSpPr>
-          <p:nvPr>
-            <p:ph type="sldNum" sz="quarter" idx="5"/>
-          </p:nvPr>
-        </p:nvSpPr>
-        <p:spPr>
-          <a:xfrm>
-            <a:off x="3884613" y="8685213"/>
-            <a:ext cx="2971800" cy="458787"/>
-          </a:xfrm>
-          <a:prstGeom prst="rect">
-            <a:avLst/>
-          </a:prstGeom>
-        </p:spPr>
-        <p:txBody>
-          <a:bodyPr vert="horz" lIns="91440" tIns="45720" rIns="91440" bIns="45720" rtlCol="0" anchor="b"/>
-          <a:lstStyle>
-            <a:lvl1pPr algn="r">
-              <a:defRPr sz="1200"/>
-            </a:lvl1pPr>
-          </a:lstStyle>
-          <a:p>
-            <a:fld id="{CE5E9CC1-C706-0F49-92D6-E571CC5EEA8F}" type="slidenum">
-              <a:rPr lang="en-US"/>
-              <a:t>‹#›</a:t>
-            </a:fld>
-            <a:endParaRPr lang="en-US"/>
-          </a:p>
-        </p:txBody>
-      </p:sp>
     </p:spTree>
     <p:extLst>
       <p:ext uri="{BB962C8B-B14F-4D97-AF65-F5344CB8AC3E}">
-        <p14:creationId xmlns:p14="http://schemas.microsoft.com/office/powerpoint/2010/main" val="1024086991"/>
+        <p14:creationId xmlns:p14="http://schemas.microsoft.com/office/powerpoint/2010/main" val="4255413724"/>
       </p:ext>
     </p:extLst>
   </p:cSld>
@@ -510,10 +291,6 @@
           <a:bodyPr/>
           <a:lstStyle/>
           <a:p>
-            <a:r>
-              <a:rPr lang="en-US" dirty="0"/>
-              <a:t/>
-            </a:r>
             <a:endParaRPr lang="en-US" dirty="0"/>
           </a:p>
         </p:txBody>
@@ -598,10 +375,6 @@
           <a:bodyPr/>
           <a:lstStyle/>
           <a:p>
-            <a:r>
-              <a:rPr lang="en-US" dirty="0"/>
-              <a:t/>
-            </a:r>
             <a:endParaRPr lang="en-US" dirty="0"/>
           </a:p>
         </p:txBody>
@@ -686,10 +459,6 @@
           <a:bodyPr/>
           <a:lstStyle/>
           <a:p>
-            <a:r>
-              <a:rPr lang="en-US" dirty="0"/>
-              <a:t/>
-            </a:r>
             <a:endParaRPr lang="en-US" dirty="0"/>
           </a:p>
         </p:txBody>
@@ -774,10 +543,6 @@
           <a:bodyPr/>
           <a:lstStyle/>
           <a:p>
-            <a:r>
-              <a:rPr lang="en-US" dirty="0"/>
-              <a:t/>
-            </a:r>
             <a:endParaRPr lang="en-US" dirty="0"/>
           </a:p>
         </p:txBody>
@@ -862,10 +627,6 @@
           <a:bodyPr/>
           <a:lstStyle/>
           <a:p>
-            <a:r>
-              <a:rPr lang="en-US" dirty="0"/>
-              <a:t/>
-            </a:r>
             <a:endParaRPr lang="en-US" dirty="0"/>
           </a:p>
         </p:txBody>
@@ -950,10 +711,6 @@
           <a:bodyPr/>
           <a:lstStyle/>
           <a:p>
-            <a:r>
-              <a:rPr lang="en-US" dirty="0"/>
-              <a:t/>
-            </a:r>
             <a:endParaRPr lang="en-US" dirty="0"/>
           </a:p>
         </p:txBody>
@@ -1038,10 +795,6 @@
           <a:bodyPr/>
           <a:lstStyle/>
           <a:p>
-            <a:r>
-              <a:rPr lang="en-US" dirty="0"/>
-              <a:t/>
-            </a:r>
             <a:endParaRPr lang="en-US" dirty="0"/>
           </a:p>
         </p:txBody>
@@ -1126,10 +879,6 @@
           <a:bodyPr/>
           <a:lstStyle/>
           <a:p>
-            <a:r>
-              <a:rPr lang="en-US" dirty="0"/>
-              <a:t/>
-            </a:r>
             <a:endParaRPr lang="en-US" dirty="0"/>
           </a:p>
         </p:txBody>
@@ -1214,10 +963,6 @@
           <a:bodyPr/>
           <a:lstStyle/>
           <a:p>
-            <a:r>
-              <a:rPr lang="en-US" dirty="0"/>
-              <a:t/>
-            </a:r>
             <a:endParaRPr lang="en-US" dirty="0"/>
           </a:p>
         </p:txBody>
@@ -1302,10 +1047,6 @@
           <a:bodyPr/>
           <a:lstStyle/>
           <a:p>
-            <a:r>
-              <a:rPr lang="en-US" dirty="0"/>
-              <a:t/>
-            </a:r>
             <a:endParaRPr lang="en-US" dirty="0"/>
           </a:p>
         </p:txBody>
@@ -1390,10 +1131,6 @@
           <a:bodyPr/>
           <a:lstStyle/>
           <a:p>
-            <a:r>
-              <a:rPr lang="en-US" dirty="0"/>
-              <a:t/>
-            </a:r>
             <a:endParaRPr lang="en-US" dirty="0"/>
           </a:p>
         </p:txBody>
@@ -1467,6 +1204,11 @@
 <file path=ppt/slideMasters/slideMaster1.xml><?xml version="1.0" encoding="utf-8"?>
 <p:sldMaster xmlns:a="http://schemas.openxmlformats.org/drawingml/2006/main" xmlns:r="http://schemas.openxmlformats.org/officeDocument/2006/relationships" xmlns:p="http://schemas.openxmlformats.org/presentationml/2006/main">
   <p:cSld>
+    <p:bg>
+      <p:bgRef idx="1001">
+        <a:schemeClr val="bg1"/>
+      </p:bgRef>
+    </p:bg>
     <p:spTree>
       <p:nvGrpSpPr>
         <p:cNvPr id="1" name=""/>
@@ -1749,6 +1491,7 @@
         <a:solidFill>
           <a:srgbClr val="FFFFFF"/>
         </a:solidFill>
+        <a:effectLst/>
       </p:bgPr>
     </p:bg>
     <p:spTree>
@@ -1789,6 +1532,13 @@
             <a:prstDash val="solid"/>
           </a:ln>
         </p:spPr>
+        <p:txBody>
+          <a:bodyPr/>
+          <a:lstStyle/>
+          <a:p>
+            <a:endParaRPr lang="en-US"/>
+          </a:p>
+        </p:txBody>
       </p:sp>
       <p:sp>
         <p:nvSpPr>
@@ -1814,6 +1564,13 @@
             <a:prstDash val="solid"/>
           </a:ln>
         </p:spPr>
+        <p:txBody>
+          <a:bodyPr/>
+          <a:lstStyle/>
+          <a:p>
+            <a:endParaRPr lang="en-US"/>
+          </a:p>
+        </p:txBody>
       </p:sp>
       <p:sp>
         <p:nvSpPr>
@@ -1836,7 +1593,7 @@
           <a:bodyPr wrap="square" lIns="0" tIns="0" rIns="0" bIns="0" rtlCol="0" anchor="ctr"/>
           <a:lstStyle/>
           <a:p>
-            <a:pPr indent="0" marL="0">
+            <a:pPr marL="0" indent="0">
               <a:buNone/>
             </a:pPr>
             <a:r>
@@ -1875,7 +1632,7 @@
           <a:bodyPr wrap="square" lIns="0" tIns="0" rIns="0" bIns="0" rtlCol="0" anchor="ctr"/>
           <a:lstStyle/>
           <a:p>
-            <a:pPr indent="0" marL="0">
+            <a:pPr marL="0" indent="0">
               <a:buNone/>
             </a:pPr>
             <a:r>
@@ -1914,7 +1671,7 @@
           <a:bodyPr wrap="square" lIns="0" tIns="0" rIns="0" bIns="0" rtlCol="0" anchor="ctr"/>
           <a:lstStyle/>
           <a:p>
-            <a:pPr indent="0" marL="0">
+            <a:pPr marL="0" indent="0">
               <a:buNone/>
             </a:pPr>
             <a:r>
@@ -1931,7 +1688,7 @@
             <a:endParaRPr lang="en-US" sz="2200" dirty="0"/>
           </a:p>
           <a:p>
-            <a:pPr indent="0" marL="0">
+            <a:pPr marL="0" indent="0">
               <a:buNone/>
             </a:pPr>
             <a:r>
@@ -1970,7 +1727,7 @@
           <a:bodyPr wrap="square" lIns="0" tIns="0" rIns="0" bIns="0" rtlCol="0" anchor="t"/>
           <a:lstStyle/>
           <a:p>
-            <a:pPr indent="0" marL="0">
+            <a:pPr marL="0" indent="0">
               <a:buNone/>
             </a:pPr>
             <a:r>
@@ -2009,9 +1766,20 @@
           <a:bodyPr wrap="square" lIns="0" tIns="0" rIns="0" bIns="0" rtlCol="0" anchor="ctr"/>
           <a:lstStyle/>
           <a:p>
-            <a:pPr indent="0" marL="0">
-              <a:buNone/>
-            </a:pPr>
+            <a:pPr marL="0" indent="0">
+              <a:buNone/>
+            </a:pPr>
+            <a:r>
+              <a:rPr lang="en-US" dirty="0">
+                <a:solidFill>
+                  <a:srgbClr val="191919"/>
+                </a:solidFill>
+                <a:latin typeface="Times New Roman" pitchFamily="34" charset="0"/>
+                <a:ea typeface="Times New Roman" pitchFamily="34" charset="-122"/>
+                <a:cs typeface="Times New Roman" pitchFamily="34" charset="-120"/>
+              </a:rPr>
+              <a:t>M</a:t>
+            </a:r>
             <a:r>
               <a:rPr lang="en-US" sz="1800" dirty="0">
                 <a:solidFill>
@@ -2021,12 +1789,12 @@
                 <a:ea typeface="Times New Roman" pitchFamily="34" charset="-122"/>
                 <a:cs typeface="Times New Roman" pitchFamily="34" charset="-120"/>
               </a:rPr>
-              <a:t>Dr. Manoj Kaushik</a:t>
+              <a:t>r. Manoj Kaushik</a:t>
             </a:r>
             <a:endParaRPr lang="en-US" sz="1800" dirty="0"/>
           </a:p>
           <a:p>
-            <a:pPr indent="0" marL="0">
+            <a:pPr marL="0" indent="0">
               <a:buNone/>
             </a:pPr>
             <a:r>
@@ -2043,7 +1811,7 @@
             <a:endParaRPr lang="en-US" sz="1800" dirty="0"/>
           </a:p>
           <a:p>
-            <a:pPr indent="0" marL="0">
+            <a:pPr marL="0" indent="0">
               <a:buNone/>
             </a:pPr>
             <a:r>
@@ -2087,17 +1855,24 @@
             <a:prstDash val="solid"/>
           </a:ln>
         </p:spPr>
+        <p:txBody>
+          <a:bodyPr/>
+          <a:lstStyle/>
+          <a:p>
+            <a:endParaRPr lang="en-US"/>
+          </a:p>
+        </p:txBody>
       </p:sp>
       <p:pic>
         <p:nvPicPr>
-          <p:cNvPr id="10" name="Image 0" descr="/home/claude/work9/icon9_minimisation.png">    </p:cNvPr>
+          <p:cNvPr id="10" name="Image 0" descr="/home/claude/work9/icon9_minimisation.png"/>
           <p:cNvPicPr>
             <a:picLocks noChangeAspect="1"/>
           </p:cNvPicPr>
           <p:nvPr/>
         </p:nvPicPr>
         <p:blipFill>
-          <a:blip r:embed="rId1"/>
+          <a:blip r:embed="rId3"/>
           <a:stretch>
             <a:fillRect/>
           </a:stretch>
@@ -2133,7 +1908,7 @@
           <a:bodyPr wrap="square" lIns="0" tIns="0" rIns="0" bIns="0" rtlCol="0" anchor="t"/>
           <a:lstStyle/>
           <a:p>
-            <a:pPr algn="ctr" indent="0" marL="0">
+            <a:pPr marL="0" indent="0" algn="ctr">
               <a:buNone/>
             </a:pPr>
             <a:r>
@@ -2177,17 +1952,24 @@
             <a:prstDash val="solid"/>
           </a:ln>
         </p:spPr>
+        <p:txBody>
+          <a:bodyPr/>
+          <a:lstStyle/>
+          <a:p>
+            <a:endParaRPr lang="en-US"/>
+          </a:p>
+        </p:txBody>
       </p:sp>
       <p:pic>
         <p:nvPicPr>
-          <p:cNvPr id="13" name="Image 1" descr="/home/claude/work9/icon9_anonymisation.png">    </p:cNvPr>
+          <p:cNvPr id="13" name="Image 1" descr="/home/claude/work9/icon9_anonymisation.png"/>
           <p:cNvPicPr>
             <a:picLocks noChangeAspect="1"/>
           </p:cNvPicPr>
           <p:nvPr/>
         </p:nvPicPr>
         <p:blipFill>
-          <a:blip r:embed="rId2"/>
+          <a:blip r:embed="rId4"/>
           <a:stretch>
             <a:fillRect/>
           </a:stretch>
@@ -2223,7 +2005,7 @@
           <a:bodyPr wrap="square" lIns="0" tIns="0" rIns="0" bIns="0" rtlCol="0" anchor="t"/>
           <a:lstStyle/>
           <a:p>
-            <a:pPr algn="ctr" indent="0" marL="0">
+            <a:pPr marL="0" indent="0" algn="ctr">
               <a:buNone/>
             </a:pPr>
             <a:r>
@@ -2267,17 +2049,24 @@
             <a:prstDash val="solid"/>
           </a:ln>
         </p:spPr>
+        <p:txBody>
+          <a:bodyPr/>
+          <a:lstStyle/>
+          <a:p>
+            <a:endParaRPr lang="en-US"/>
+          </a:p>
+        </p:txBody>
       </p:sp>
       <p:pic>
         <p:nvPicPr>
-          <p:cNvPr id="16" name="Image 2" descr="/home/claude/work9/icon9_accesscontrol.png">    </p:cNvPr>
+          <p:cNvPr id="16" name="Image 2" descr="/home/claude/work9/icon9_accesscontrol.png"/>
           <p:cNvPicPr>
             <a:picLocks noChangeAspect="1"/>
           </p:cNvPicPr>
           <p:nvPr/>
         </p:nvPicPr>
         <p:blipFill>
-          <a:blip r:embed="rId3"/>
+          <a:blip r:embed="rId5"/>
           <a:stretch>
             <a:fillRect/>
           </a:stretch>
@@ -2313,7 +2102,7 @@
           <a:bodyPr wrap="square" lIns="0" tIns="0" rIns="0" bIns="0" rtlCol="0" anchor="t"/>
           <a:lstStyle/>
           <a:p>
-            <a:pPr algn="ctr" indent="0" marL="0">
+            <a:pPr marL="0" indent="0" algn="ctr">
               <a:buNone/>
             </a:pPr>
             <a:r>
@@ -2357,17 +2146,24 @@
             <a:prstDash val="solid"/>
           </a:ln>
         </p:spPr>
+        <p:txBody>
+          <a:bodyPr/>
+          <a:lstStyle/>
+          <a:p>
+            <a:endParaRPr lang="en-US"/>
+          </a:p>
+        </p:txBody>
       </p:sp>
       <p:pic>
         <p:nvPicPr>
-          <p:cNvPr id="19" name="Image 3" descr="/home/claude/work9/icon9_demo.png">    </p:cNvPr>
+          <p:cNvPr id="19" name="Image 3" descr="/home/claude/work9/icon9_demo.png"/>
           <p:cNvPicPr>
             <a:picLocks noChangeAspect="1"/>
           </p:cNvPicPr>
           <p:nvPr/>
         </p:nvPicPr>
         <p:blipFill>
-          <a:blip r:embed="rId4"/>
+          <a:blip r:embed="rId6"/>
           <a:stretch>
             <a:fillRect/>
           </a:stretch>
@@ -2403,7 +2199,7 @@
           <a:bodyPr wrap="square" lIns="0" tIns="0" rIns="0" bIns="0" rtlCol="0" anchor="t"/>
           <a:lstStyle/>
           <a:p>
-            <a:pPr algn="ctr" indent="0" marL="0">
+            <a:pPr marL="0" indent="0" algn="ctr">
               <a:buNone/>
             </a:pPr>
             <a:r>
@@ -2442,7 +2238,7 @@
           <a:bodyPr wrap="square" lIns="0" tIns="0" rIns="0" bIns="0" rtlCol="0" anchor="ctr"/>
           <a:lstStyle/>
           <a:p>
-            <a:pPr algn="ctr" indent="0" marL="0">
+            <a:pPr marL="0" indent="0" algn="ctr">
               <a:buNone/>
             </a:pPr>
             <a:r>
@@ -2476,6 +2272,7 @@
         <a:solidFill>
           <a:srgbClr val="FFFFFF"/>
         </a:solidFill>
+        <a:effectLst/>
       </p:bgPr>
     </p:bg>
     <p:spTree>
@@ -2516,6 +2313,13 @@
             <a:prstDash val="solid"/>
           </a:ln>
         </p:spPr>
+        <p:txBody>
+          <a:bodyPr/>
+          <a:lstStyle/>
+          <a:p>
+            <a:endParaRPr lang="en-US"/>
+          </a:p>
+        </p:txBody>
       </p:sp>
       <p:sp>
         <p:nvSpPr>
@@ -2541,6 +2345,13 @@
             <a:prstDash val="solid"/>
           </a:ln>
         </p:spPr>
+        <p:txBody>
+          <a:bodyPr/>
+          <a:lstStyle/>
+          <a:p>
+            <a:endParaRPr lang="en-US"/>
+          </a:p>
+        </p:txBody>
       </p:sp>
       <p:sp>
         <p:nvSpPr>
@@ -2563,7 +2374,7 @@
           <a:bodyPr wrap="square" lIns="0" tIns="0" rIns="0" bIns="0" rtlCol="0" anchor="ctr"/>
           <a:lstStyle/>
           <a:p>
-            <a:pPr indent="0" marL="0">
+            <a:pPr marL="0" indent="0">
               <a:buNone/>
             </a:pPr>
             <a:r>
@@ -2602,7 +2413,7 @@
           <a:bodyPr wrap="square" lIns="0" tIns="0" rIns="0" bIns="0" rtlCol="0" anchor="ctr"/>
           <a:lstStyle/>
           <a:p>
-            <a:pPr algn="r" indent="0" marL="0">
+            <a:pPr marL="0" indent="0" algn="r">
               <a:buNone/>
             </a:pPr>
             <a:r>
@@ -2641,7 +2452,7 @@
           <a:bodyPr wrap="square" lIns="0" tIns="0" rIns="0" bIns="0" rtlCol="0" anchor="ctr"/>
           <a:lstStyle/>
           <a:p>
-            <a:pPr indent="0" marL="0">
+            <a:pPr marL="0" indent="0">
               <a:buNone/>
             </a:pPr>
             <a:r>
@@ -2680,7 +2491,7 @@
           <a:bodyPr wrap="square" lIns="50800" tIns="50800" rIns="50800" bIns="50800" rtlCol="0" anchor="t"/>
           <a:lstStyle/>
           <a:p>
-            <a:pPr indent="0" marL="0">
+            <a:pPr marL="0" indent="0">
               <a:buNone/>
             </a:pPr>
             <a:r>
@@ -2721,9 +2532,27 @@
             <a:tbl>
               <a:tblPr/>
               <a:tblGrid>
-                <a:gridCol w="2743200"/>
-                <a:gridCol w="3566160"/>
-                <a:gridCol w="4937760"/>
+                <a:gridCol w="2743200">
+                  <a:extLst>
+                    <a:ext uri="{9D8B030D-6E8A-4147-A177-3AD203B41FA5}">
+                      <a16:colId xmlns:a16="http://schemas.microsoft.com/office/drawing/2014/main" val="20000"/>
+                    </a:ext>
+                  </a:extLst>
+                </a:gridCol>
+                <a:gridCol w="3566160">
+                  <a:extLst>
+                    <a:ext uri="{9D8B030D-6E8A-4147-A177-3AD203B41FA5}">
+                      <a16:colId xmlns:a16="http://schemas.microsoft.com/office/drawing/2014/main" val="20001"/>
+                    </a:ext>
+                  </a:extLst>
+                </a:gridCol>
+                <a:gridCol w="4937760">
+                  <a:extLst>
+                    <a:ext uri="{9D8B030D-6E8A-4147-A177-3AD203B41FA5}">
+                      <a16:colId xmlns:a16="http://schemas.microsoft.com/office/drawing/2014/main" val="20002"/>
+                    </a:ext>
+                  </a:extLst>
+                </a:gridCol>
               </a:tblGrid>
               <a:tr h="655320">
                 <a:tc>
@@ -2731,7 +2560,7 @@
                     <a:bodyPr/>
                     <a:lstStyle/>
                     <a:p>
-                      <a:pPr algn="ctr" indent="0" marL="0">
+                      <a:pPr marL="0" indent="0" algn="ctr">
                         <a:buNone/>
                       </a:pPr>
                       <a:r>
@@ -2752,7 +2581,7 @@
                       </a:endParaRPr>
                     </a:p>
                   </a:txBody>
-                  <a:tcPr marL="91440" marR="91440" marT="45720" marB="45720" anchor="ctr">
+                  <a:tcPr anchor="ctr">
                     <a:lnL w="25400" cap="flat" cmpd="sng" algn="ctr">
                       <a:solidFill>
                         <a:srgbClr val="FFFFFF"/>
@@ -2799,7 +2628,7 @@
                     <a:bodyPr/>
                     <a:lstStyle/>
                     <a:p>
-                      <a:pPr algn="ctr" indent="0" marL="0">
+                      <a:pPr marL="0" indent="0" algn="ctr">
                         <a:buNone/>
                       </a:pPr>
                       <a:r>
@@ -2820,7 +2649,7 @@
                       </a:endParaRPr>
                     </a:p>
                   </a:txBody>
-                  <a:tcPr marL="91440" marR="91440" marT="45720" marB="45720" anchor="ctr">
+                  <a:tcPr anchor="ctr">
                     <a:lnL w="25400" cap="flat" cmpd="sng" algn="ctr">
                       <a:solidFill>
                         <a:srgbClr val="FFFFFF"/>
@@ -2867,7 +2696,7 @@
                     <a:bodyPr/>
                     <a:lstStyle/>
                     <a:p>
-                      <a:pPr algn="ctr" indent="0" marL="0">
+                      <a:pPr marL="0" indent="0" algn="ctr">
                         <a:buNone/>
                       </a:pPr>
                       <a:r>
@@ -2888,7 +2717,7 @@
                       </a:endParaRPr>
                     </a:p>
                   </a:txBody>
-                  <a:tcPr marL="91440" marR="91440" marT="45720" marB="45720" anchor="ctr">
+                  <a:tcPr anchor="ctr">
                     <a:lnL w="25400" cap="flat" cmpd="sng" algn="ctr">
                       <a:solidFill>
                         <a:srgbClr val="FFFFFF"/>
@@ -2930,6 +2759,11 @@
                     </a:solidFill>
                   </a:tcPr>
                 </a:tc>
+                <a:extLst>
+                  <a:ext uri="{0D108BD9-81ED-4DB2-BD59-A6C34878D82A}">
+                    <a16:rowId xmlns:a16="http://schemas.microsoft.com/office/drawing/2014/main" val="10000"/>
+                  </a:ext>
+                </a:extLst>
               </a:tr>
               <a:tr h="655320">
                 <a:tc>
@@ -2937,7 +2771,7 @@
                     <a:bodyPr/>
                     <a:lstStyle/>
                     <a:p>
-                      <a:pPr algn="ctr" indent="0" marL="0">
+                      <a:pPr marL="0" indent="0" algn="ctr">
                         <a:buNone/>
                       </a:pPr>
                       <a:r>
@@ -2958,7 +2792,7 @@
                       </a:endParaRPr>
                     </a:p>
                   </a:txBody>
-                  <a:tcPr marL="91440" marR="91440" marT="45720" marB="45720" anchor="ctr">
+                  <a:tcPr anchor="ctr">
                     <a:lnL w="25400" cap="flat" cmpd="sng" algn="ctr">
                       <a:solidFill>
                         <a:srgbClr val="FFFFFF"/>
@@ -3005,7 +2839,7 @@
                     <a:bodyPr/>
                     <a:lstStyle/>
                     <a:p>
-                      <a:pPr algn="ctr" indent="0" marL="0">
+                      <a:pPr marL="0" indent="0" algn="ctr">
                         <a:buNone/>
                       </a:pPr>
                       <a:r>
@@ -3026,7 +2860,7 @@
                       </a:endParaRPr>
                     </a:p>
                   </a:txBody>
-                  <a:tcPr marL="91440" marR="91440" marT="45720" marB="45720" anchor="ctr">
+                  <a:tcPr anchor="ctr">
                     <a:lnL w="25400" cap="flat" cmpd="sng" algn="ctr">
                       <a:solidFill>
                         <a:srgbClr val="FFFFFF"/>
@@ -3073,7 +2907,7 @@
                     <a:bodyPr/>
                     <a:lstStyle/>
                     <a:p>
-                      <a:pPr algn="ctr" indent="0" marL="0">
+                      <a:pPr marL="0" indent="0" algn="ctr">
                         <a:buNone/>
                       </a:pPr>
                       <a:r>
@@ -3094,7 +2928,7 @@
                       </a:endParaRPr>
                     </a:p>
                   </a:txBody>
-                  <a:tcPr marL="91440" marR="91440" marT="45720" marB="45720" anchor="ctr">
+                  <a:tcPr anchor="ctr">
                     <a:lnL w="25400" cap="flat" cmpd="sng" algn="ctr">
                       <a:solidFill>
                         <a:srgbClr val="FFFFFF"/>
@@ -3136,6 +2970,11 @@
                     </a:solidFill>
                   </a:tcPr>
                 </a:tc>
+                <a:extLst>
+                  <a:ext uri="{0D108BD9-81ED-4DB2-BD59-A6C34878D82A}">
+                    <a16:rowId xmlns:a16="http://schemas.microsoft.com/office/drawing/2014/main" val="10001"/>
+                  </a:ext>
+                </a:extLst>
               </a:tr>
               <a:tr h="655320">
                 <a:tc>
@@ -3143,7 +2982,7 @@
                     <a:bodyPr/>
                     <a:lstStyle/>
                     <a:p>
-                      <a:pPr algn="ctr" indent="0" marL="0">
+                      <a:pPr marL="0" indent="0" algn="ctr">
                         <a:buNone/>
                       </a:pPr>
                       <a:r>
@@ -3164,7 +3003,7 @@
                       </a:endParaRPr>
                     </a:p>
                   </a:txBody>
-                  <a:tcPr marL="91440" marR="91440" marT="45720" marB="45720" anchor="ctr">
+                  <a:tcPr anchor="ctr">
                     <a:lnL w="25400" cap="flat" cmpd="sng" algn="ctr">
                       <a:solidFill>
                         <a:srgbClr val="FFFFFF"/>
@@ -3211,7 +3050,7 @@
                     <a:bodyPr/>
                     <a:lstStyle/>
                     <a:p>
-                      <a:pPr algn="ctr" indent="0" marL="0">
+                      <a:pPr marL="0" indent="0" algn="ctr">
                         <a:buNone/>
                       </a:pPr>
                       <a:r>
@@ -3232,7 +3071,7 @@
                       </a:endParaRPr>
                     </a:p>
                   </a:txBody>
-                  <a:tcPr marL="91440" marR="91440" marT="45720" marB="45720" anchor="ctr">
+                  <a:tcPr anchor="ctr">
                     <a:lnL w="25400" cap="flat" cmpd="sng" algn="ctr">
                       <a:solidFill>
                         <a:srgbClr val="FFFFFF"/>
@@ -3279,7 +3118,7 @@
                     <a:bodyPr/>
                     <a:lstStyle/>
                     <a:p>
-                      <a:pPr algn="ctr" indent="0" marL="0">
+                      <a:pPr marL="0" indent="0" algn="ctr">
                         <a:buNone/>
                       </a:pPr>
                       <a:r>
@@ -3300,7 +3139,7 @@
                       </a:endParaRPr>
                     </a:p>
                   </a:txBody>
-                  <a:tcPr marL="91440" marR="91440" marT="45720" marB="45720" anchor="ctr">
+                  <a:tcPr anchor="ctr">
                     <a:lnL w="25400" cap="flat" cmpd="sng" algn="ctr">
                       <a:solidFill>
                         <a:srgbClr val="FFFFFF"/>
@@ -3342,6 +3181,11 @@
                     </a:solidFill>
                   </a:tcPr>
                 </a:tc>
+                <a:extLst>
+                  <a:ext uri="{0D108BD9-81ED-4DB2-BD59-A6C34878D82A}">
+                    <a16:rowId xmlns:a16="http://schemas.microsoft.com/office/drawing/2014/main" val="10002"/>
+                  </a:ext>
+                </a:extLst>
               </a:tr>
               <a:tr h="655320">
                 <a:tc>
@@ -3349,7 +3193,7 @@
                     <a:bodyPr/>
                     <a:lstStyle/>
                     <a:p>
-                      <a:pPr algn="ctr" indent="0" marL="0">
+                      <a:pPr marL="0" indent="0" algn="ctr">
                         <a:buNone/>
                       </a:pPr>
                       <a:r>
@@ -3370,7 +3214,7 @@
                       </a:endParaRPr>
                     </a:p>
                   </a:txBody>
-                  <a:tcPr marL="91440" marR="91440" marT="45720" marB="45720" anchor="ctr">
+                  <a:tcPr anchor="ctr">
                     <a:lnL w="25400" cap="flat" cmpd="sng" algn="ctr">
                       <a:solidFill>
                         <a:srgbClr val="FFFFFF"/>
@@ -3417,7 +3261,7 @@
                     <a:bodyPr/>
                     <a:lstStyle/>
                     <a:p>
-                      <a:pPr algn="ctr" indent="0" marL="0">
+                      <a:pPr marL="0" indent="0" algn="ctr">
                         <a:buNone/>
                       </a:pPr>
                       <a:r>
@@ -3438,7 +3282,7 @@
                       </a:endParaRPr>
                     </a:p>
                   </a:txBody>
-                  <a:tcPr marL="91440" marR="91440" marT="45720" marB="45720" anchor="ctr">
+                  <a:tcPr anchor="ctr">
                     <a:lnL w="25400" cap="flat" cmpd="sng" algn="ctr">
                       <a:solidFill>
                         <a:srgbClr val="FFFFFF"/>
@@ -3485,7 +3329,7 @@
                     <a:bodyPr/>
                     <a:lstStyle/>
                     <a:p>
-                      <a:pPr algn="ctr" indent="0" marL="0">
+                      <a:pPr marL="0" indent="0" algn="ctr">
                         <a:buNone/>
                       </a:pPr>
                       <a:r>
@@ -3506,7 +3350,7 @@
                       </a:endParaRPr>
                     </a:p>
                   </a:txBody>
-                  <a:tcPr marL="91440" marR="91440" marT="45720" marB="45720" anchor="ctr">
+                  <a:tcPr anchor="ctr">
                     <a:lnL w="25400" cap="flat" cmpd="sng" algn="ctr">
                       <a:solidFill>
                         <a:srgbClr val="FFFFFF"/>
@@ -3548,6 +3392,11 @@
                     </a:solidFill>
                   </a:tcPr>
                 </a:tc>
+                <a:extLst>
+                  <a:ext uri="{0D108BD9-81ED-4DB2-BD59-A6C34878D82A}">
+                    <a16:rowId xmlns:a16="http://schemas.microsoft.com/office/drawing/2014/main" val="10003"/>
+                  </a:ext>
+                </a:extLst>
               </a:tr>
               <a:tr h="655320">
                 <a:tc>
@@ -3555,7 +3404,7 @@
                     <a:bodyPr/>
                     <a:lstStyle/>
                     <a:p>
-                      <a:pPr algn="ctr" indent="0" marL="0">
+                      <a:pPr marL="0" indent="0" algn="ctr">
                         <a:buNone/>
                       </a:pPr>
                       <a:r>
@@ -3576,7 +3425,7 @@
                       </a:endParaRPr>
                     </a:p>
                   </a:txBody>
-                  <a:tcPr marL="91440" marR="91440" marT="45720" marB="45720" anchor="ctr">
+                  <a:tcPr anchor="ctr">
                     <a:lnL w="25400" cap="flat" cmpd="sng" algn="ctr">
                       <a:solidFill>
                         <a:srgbClr val="FFFFFF"/>
@@ -3623,7 +3472,7 @@
                     <a:bodyPr/>
                     <a:lstStyle/>
                     <a:p>
-                      <a:pPr algn="ctr" indent="0" marL="0">
+                      <a:pPr marL="0" indent="0" algn="ctr">
                         <a:buNone/>
                       </a:pPr>
                       <a:r>
@@ -3644,7 +3493,7 @@
                       </a:endParaRPr>
                     </a:p>
                   </a:txBody>
-                  <a:tcPr marL="91440" marR="91440" marT="45720" marB="45720" anchor="ctr">
+                  <a:tcPr anchor="ctr">
                     <a:lnL w="25400" cap="flat" cmpd="sng" algn="ctr">
                       <a:solidFill>
                         <a:srgbClr val="FFFFFF"/>
@@ -3691,7 +3540,7 @@
                     <a:bodyPr/>
                     <a:lstStyle/>
                     <a:p>
-                      <a:pPr algn="ctr" indent="0" marL="0">
+                      <a:pPr marL="0" indent="0" algn="ctr">
                         <a:buNone/>
                       </a:pPr>
                       <a:r>
@@ -3712,7 +3561,7 @@
                       </a:endParaRPr>
                     </a:p>
                   </a:txBody>
-                  <a:tcPr marL="91440" marR="91440" marT="45720" marB="45720" anchor="ctr">
+                  <a:tcPr anchor="ctr">
                     <a:lnL w="25400" cap="flat" cmpd="sng" algn="ctr">
                       <a:solidFill>
                         <a:srgbClr val="FFFFFF"/>
@@ -3754,6 +3603,11 @@
                     </a:solidFill>
                   </a:tcPr>
                 </a:tc>
+                <a:extLst>
+                  <a:ext uri="{0D108BD9-81ED-4DB2-BD59-A6C34878D82A}">
+                    <a16:rowId xmlns:a16="http://schemas.microsoft.com/office/drawing/2014/main" val="10004"/>
+                  </a:ext>
+                </a:extLst>
               </a:tr>
               <a:tr h="655320">
                 <a:tc>
@@ -3761,7 +3615,7 @@
                     <a:bodyPr/>
                     <a:lstStyle/>
                     <a:p>
-                      <a:pPr algn="ctr" indent="0" marL="0">
+                      <a:pPr marL="0" indent="0" algn="ctr">
                         <a:buNone/>
                       </a:pPr>
                       <a:r>
@@ -3782,7 +3636,7 @@
                       </a:endParaRPr>
                     </a:p>
                   </a:txBody>
-                  <a:tcPr marL="91440" marR="91440" marT="45720" marB="45720" anchor="ctr">
+                  <a:tcPr anchor="ctr">
                     <a:lnL w="25400" cap="flat" cmpd="sng" algn="ctr">
                       <a:solidFill>
                         <a:srgbClr val="FFFFFF"/>
@@ -3829,7 +3683,7 @@
                     <a:bodyPr/>
                     <a:lstStyle/>
                     <a:p>
-                      <a:pPr algn="ctr" indent="0" marL="0">
+                      <a:pPr marL="0" indent="0" algn="ctr">
                         <a:buNone/>
                       </a:pPr>
                       <a:r>
@@ -3850,7 +3704,7 @@
                       </a:endParaRPr>
                     </a:p>
                   </a:txBody>
-                  <a:tcPr marL="91440" marR="91440" marT="45720" marB="45720" anchor="ctr">
+                  <a:tcPr anchor="ctr">
                     <a:lnL w="25400" cap="flat" cmpd="sng" algn="ctr">
                       <a:solidFill>
                         <a:srgbClr val="FFFFFF"/>
@@ -3897,7 +3751,7 @@
                     <a:bodyPr/>
                     <a:lstStyle/>
                     <a:p>
-                      <a:pPr algn="ctr" indent="0" marL="0">
+                      <a:pPr marL="0" indent="0" algn="ctr">
                         <a:buNone/>
                       </a:pPr>
                       <a:r>
@@ -3918,7 +3772,7 @@
                       </a:endParaRPr>
                     </a:p>
                   </a:txBody>
-                  <a:tcPr marL="91440" marR="91440" marT="45720" marB="45720" anchor="ctr">
+                  <a:tcPr anchor="ctr">
                     <a:lnL w="25400" cap="flat" cmpd="sng" algn="ctr">
                       <a:solidFill>
                         <a:srgbClr val="FFFFFF"/>
@@ -3960,6 +3814,11 @@
                     </a:solidFill>
                   </a:tcPr>
                 </a:tc>
+                <a:extLst>
+                  <a:ext uri="{0D108BD9-81ED-4DB2-BD59-A6C34878D82A}">
+                    <a16:rowId xmlns:a16="http://schemas.microsoft.com/office/drawing/2014/main" val="10005"/>
+                  </a:ext>
+                </a:extLst>
               </a:tr>
             </a:tbl>
           </a:graphicData>
@@ -3986,7 +3845,7 @@
           <a:bodyPr wrap="square" lIns="0" tIns="0" rIns="0" bIns="0" rtlCol="0" anchor="ctr"/>
           <a:lstStyle/>
           <a:p>
-            <a:pPr algn="ctr" indent="0" marL="0">
+            <a:pPr marL="0" indent="0" algn="ctr">
               <a:buNone/>
             </a:pPr>
             <a:r>
@@ -4020,6 +3879,7 @@
         <a:solidFill>
           <a:srgbClr val="FFFFFF"/>
         </a:solidFill>
+        <a:effectLst/>
       </p:bgPr>
     </p:bg>
     <p:spTree>
@@ -4060,6 +3920,13 @@
             <a:prstDash val="solid"/>
           </a:ln>
         </p:spPr>
+        <p:txBody>
+          <a:bodyPr/>
+          <a:lstStyle/>
+          <a:p>
+            <a:endParaRPr lang="en-US"/>
+          </a:p>
+        </p:txBody>
       </p:sp>
       <p:sp>
         <p:nvSpPr>
@@ -4085,6 +3952,13 @@
             <a:prstDash val="solid"/>
           </a:ln>
         </p:spPr>
+        <p:txBody>
+          <a:bodyPr/>
+          <a:lstStyle/>
+          <a:p>
+            <a:endParaRPr lang="en-US"/>
+          </a:p>
+        </p:txBody>
       </p:sp>
       <p:sp>
         <p:nvSpPr>
@@ -4107,7 +3981,7 @@
           <a:bodyPr wrap="square" lIns="0" tIns="0" rIns="0" bIns="0" rtlCol="0" anchor="ctr"/>
           <a:lstStyle/>
           <a:p>
-            <a:pPr indent="0" marL="0">
+            <a:pPr marL="0" indent="0">
               <a:buNone/>
             </a:pPr>
             <a:r>
@@ -4146,7 +4020,7 @@
           <a:bodyPr wrap="square" lIns="0" tIns="0" rIns="0" bIns="0" rtlCol="0" anchor="ctr"/>
           <a:lstStyle/>
           <a:p>
-            <a:pPr algn="r" indent="0" marL="0">
+            <a:pPr marL="0" indent="0" algn="r">
               <a:buNone/>
             </a:pPr>
             <a:r>
@@ -4185,7 +4059,7 @@
           <a:bodyPr wrap="square" lIns="0" tIns="0" rIns="0" bIns="0" rtlCol="0" anchor="ctr"/>
           <a:lstStyle/>
           <a:p>
-            <a:pPr indent="0" marL="0">
+            <a:pPr marL="0" indent="0">
               <a:buNone/>
             </a:pPr>
             <a:r>
@@ -4224,7 +4098,7 @@
           <a:bodyPr wrap="square" lIns="50800" tIns="50800" rIns="50800" bIns="50800" rtlCol="0" anchor="t"/>
           <a:lstStyle/>
           <a:p>
-            <a:pPr indent="0" marL="0">
+            <a:pPr marL="0" indent="0">
               <a:buNone/>
             </a:pPr>
             <a:r>
@@ -4241,13 +4115,13 @@
             <a:endParaRPr lang="en-US" sz="1800" dirty="0"/>
           </a:p>
           <a:p>
-            <a:pPr indent="0" marL="0">
+            <a:pPr marL="0" indent="0">
               <a:buNone/>
             </a:pPr>
             <a:endParaRPr lang="en-US" sz="1800" dirty="0"/>
           </a:p>
           <a:p>
-            <a:pPr indent="0" marL="0">
+            <a:pPr marL="0" indent="0">
               <a:buNone/>
             </a:pPr>
             <a:r>
@@ -4264,13 +4138,13 @@
             <a:endParaRPr lang="en-US" sz="1800" dirty="0"/>
           </a:p>
           <a:p>
-            <a:pPr indent="0" marL="0">
+            <a:pPr marL="0" indent="0">
               <a:buNone/>
             </a:pPr>
             <a:endParaRPr lang="en-US" sz="1800" dirty="0"/>
           </a:p>
           <a:p>
-            <a:pPr indent="0" marL="0">
+            <a:pPr marL="0" indent="0">
               <a:buNone/>
             </a:pPr>
             <a:r>
@@ -4287,13 +4161,13 @@
             <a:endParaRPr lang="en-US" sz="1800" dirty="0"/>
           </a:p>
           <a:p>
-            <a:pPr indent="0" marL="0">
+            <a:pPr marL="0" indent="0">
               <a:buNone/>
             </a:pPr>
             <a:endParaRPr lang="en-US" sz="1800" dirty="0"/>
           </a:p>
           <a:p>
-            <a:pPr indent="0" marL="0">
+            <a:pPr marL="0" indent="0">
               <a:buNone/>
             </a:pPr>
             <a:r>
@@ -4332,7 +4206,7 @@
           <a:bodyPr wrap="square" lIns="0" tIns="0" rIns="0" bIns="0" rtlCol="0" anchor="ctr"/>
           <a:lstStyle/>
           <a:p>
-            <a:pPr algn="ctr" indent="0" marL="0">
+            <a:pPr marL="0" indent="0" algn="ctr">
               <a:buNone/>
             </a:pPr>
             <a:r>
@@ -4366,6 +4240,7 @@
         <a:solidFill>
           <a:srgbClr val="FFFFFF"/>
         </a:solidFill>
+        <a:effectLst/>
       </p:bgPr>
     </p:bg>
     <p:spTree>
@@ -4406,6 +4281,13 @@
             <a:prstDash val="solid"/>
           </a:ln>
         </p:spPr>
+        <p:txBody>
+          <a:bodyPr/>
+          <a:lstStyle/>
+          <a:p>
+            <a:endParaRPr lang="en-US"/>
+          </a:p>
+        </p:txBody>
       </p:sp>
       <p:sp>
         <p:nvSpPr>
@@ -4431,6 +4313,13 @@
             <a:prstDash val="solid"/>
           </a:ln>
         </p:spPr>
+        <p:txBody>
+          <a:bodyPr/>
+          <a:lstStyle/>
+          <a:p>
+            <a:endParaRPr lang="en-US"/>
+          </a:p>
+        </p:txBody>
       </p:sp>
       <p:sp>
         <p:nvSpPr>
@@ -4453,7 +4342,7 @@
           <a:bodyPr wrap="square" lIns="0" tIns="0" rIns="0" bIns="0" rtlCol="0" anchor="ctr"/>
           <a:lstStyle/>
           <a:p>
-            <a:pPr indent="0" marL="0">
+            <a:pPr marL="0" indent="0">
               <a:buNone/>
             </a:pPr>
             <a:r>
@@ -4492,7 +4381,7 @@
           <a:bodyPr wrap="square" lIns="0" tIns="0" rIns="0" bIns="0" rtlCol="0" anchor="ctr"/>
           <a:lstStyle/>
           <a:p>
-            <a:pPr algn="r" indent="0" marL="0">
+            <a:pPr marL="0" indent="0" algn="r">
               <a:buNone/>
             </a:pPr>
             <a:r>
@@ -4531,7 +4420,7 @@
           <a:bodyPr wrap="square" lIns="0" tIns="0" rIns="0" bIns="0" rtlCol="0" anchor="ctr"/>
           <a:lstStyle/>
           <a:p>
-            <a:pPr indent="0" marL="0">
+            <a:pPr marL="0" indent="0">
               <a:buNone/>
             </a:pPr>
             <a:r>
@@ -4570,7 +4459,7 @@
           <a:bodyPr wrap="square" lIns="50800" tIns="50800" rIns="50800" bIns="50800" rtlCol="0" anchor="t"/>
           <a:lstStyle/>
           <a:p>
-            <a:pPr indent="0" marL="0">
+            <a:pPr marL="0" indent="0">
               <a:buNone/>
             </a:pPr>
             <a:r>
@@ -4587,13 +4476,13 @@
             <a:endParaRPr lang="en-US" sz="1800" dirty="0"/>
           </a:p>
           <a:p>
-            <a:pPr indent="0" marL="0">
+            <a:pPr marL="0" indent="0">
               <a:buNone/>
             </a:pPr>
             <a:endParaRPr lang="en-US" sz="1800" dirty="0"/>
           </a:p>
           <a:p>
-            <a:pPr indent="0" marL="0">
+            <a:pPr marL="0" indent="0">
               <a:buNone/>
             </a:pPr>
             <a:r>
@@ -4610,13 +4499,13 @@
             <a:endParaRPr lang="en-US" sz="1800" dirty="0"/>
           </a:p>
           <a:p>
-            <a:pPr indent="0" marL="0">
+            <a:pPr marL="0" indent="0">
               <a:buNone/>
             </a:pPr>
             <a:endParaRPr lang="en-US" sz="1800" dirty="0"/>
           </a:p>
           <a:p>
-            <a:pPr indent="0" marL="0">
+            <a:pPr marL="0" indent="0">
               <a:buNone/>
             </a:pPr>
             <a:r>
@@ -4633,13 +4522,13 @@
             <a:endParaRPr lang="en-US" sz="1800" dirty="0"/>
           </a:p>
           <a:p>
-            <a:pPr indent="0" marL="0">
+            <a:pPr marL="0" indent="0">
               <a:buNone/>
             </a:pPr>
             <a:endParaRPr lang="en-US" sz="1800" dirty="0"/>
           </a:p>
           <a:p>
-            <a:pPr indent="0" marL="0">
+            <a:pPr marL="0" indent="0">
               <a:buNone/>
             </a:pPr>
             <a:r>
@@ -4678,7 +4567,7 @@
           <a:bodyPr wrap="square" lIns="0" tIns="0" rIns="0" bIns="0" rtlCol="0" anchor="ctr"/>
           <a:lstStyle/>
           <a:p>
-            <a:pPr algn="ctr" indent="0" marL="0">
+            <a:pPr marL="0" indent="0" algn="ctr">
               <a:buNone/>
             </a:pPr>
             <a:r>
@@ -4712,6 +4601,7 @@
         <a:solidFill>
           <a:srgbClr val="FFFFFF"/>
         </a:solidFill>
+        <a:effectLst/>
       </p:bgPr>
     </p:bg>
     <p:spTree>
@@ -4752,6 +4642,13 @@
             <a:prstDash val="solid"/>
           </a:ln>
         </p:spPr>
+        <p:txBody>
+          <a:bodyPr/>
+          <a:lstStyle/>
+          <a:p>
+            <a:endParaRPr lang="en-US"/>
+          </a:p>
+        </p:txBody>
       </p:sp>
       <p:sp>
         <p:nvSpPr>
@@ -4777,6 +4674,13 @@
             <a:prstDash val="solid"/>
           </a:ln>
         </p:spPr>
+        <p:txBody>
+          <a:bodyPr/>
+          <a:lstStyle/>
+          <a:p>
+            <a:endParaRPr lang="en-US"/>
+          </a:p>
+        </p:txBody>
       </p:sp>
       <p:sp>
         <p:nvSpPr>
@@ -4799,7 +4703,7 @@
           <a:bodyPr wrap="square" lIns="0" tIns="0" rIns="0" bIns="0" rtlCol="0" anchor="ctr"/>
           <a:lstStyle/>
           <a:p>
-            <a:pPr indent="0" marL="0">
+            <a:pPr marL="0" indent="0">
               <a:buNone/>
             </a:pPr>
             <a:r>
@@ -4838,7 +4742,7 @@
           <a:bodyPr wrap="square" lIns="0" tIns="0" rIns="0" bIns="0" rtlCol="0" anchor="ctr"/>
           <a:lstStyle/>
           <a:p>
-            <a:pPr algn="r" indent="0" marL="0">
+            <a:pPr marL="0" indent="0" algn="r">
               <a:buNone/>
             </a:pPr>
             <a:r>
@@ -4877,7 +4781,7 @@
           <a:bodyPr wrap="square" lIns="0" tIns="0" rIns="0" bIns="0" rtlCol="0" anchor="ctr"/>
           <a:lstStyle/>
           <a:p>
-            <a:pPr indent="0" marL="0">
+            <a:pPr marL="0" indent="0">
               <a:buNone/>
             </a:pPr>
             <a:r>
@@ -4916,7 +4820,7 @@
           <a:bodyPr wrap="square" lIns="50800" tIns="50800" rIns="50800" bIns="50800" rtlCol="0" anchor="t"/>
           <a:lstStyle/>
           <a:p>
-            <a:pPr indent="0" marL="0">
+            <a:pPr marL="0" indent="0">
               <a:buNone/>
             </a:pPr>
             <a:r>
@@ -4933,13 +4837,13 @@
             <a:endParaRPr lang="en-US" sz="1800" dirty="0"/>
           </a:p>
           <a:p>
-            <a:pPr indent="0" marL="0">
+            <a:pPr marL="0" indent="0">
               <a:buNone/>
             </a:pPr>
             <a:endParaRPr lang="en-US" sz="1800" dirty="0"/>
           </a:p>
           <a:p>
-            <a:pPr indent="0" marL="0">
+            <a:pPr marL="0" indent="0">
               <a:buNone/>
             </a:pPr>
             <a:r>
@@ -4956,13 +4860,13 @@
             <a:endParaRPr lang="en-US" sz="1800" dirty="0"/>
           </a:p>
           <a:p>
-            <a:pPr indent="0" marL="0">
+            <a:pPr marL="0" indent="0">
               <a:buNone/>
             </a:pPr>
             <a:endParaRPr lang="en-US" sz="1800" dirty="0"/>
           </a:p>
           <a:p>
-            <a:pPr indent="0" marL="0">
+            <a:pPr marL="0" indent="0">
               <a:buNone/>
             </a:pPr>
             <a:r>
@@ -4979,13 +4883,13 @@
             <a:endParaRPr lang="en-US" sz="1800" dirty="0"/>
           </a:p>
           <a:p>
-            <a:pPr indent="0" marL="0">
+            <a:pPr marL="0" indent="0">
               <a:buNone/>
             </a:pPr>
             <a:endParaRPr lang="en-US" sz="1800" dirty="0"/>
           </a:p>
           <a:p>
-            <a:pPr indent="0" marL="0">
+            <a:pPr marL="0" indent="0">
               <a:buNone/>
             </a:pPr>
             <a:r>
@@ -5024,7 +4928,7 @@
           <a:bodyPr wrap="square" lIns="0" tIns="0" rIns="0" bIns="0" rtlCol="0" anchor="ctr"/>
           <a:lstStyle/>
           <a:p>
-            <a:pPr algn="ctr" indent="0" marL="0">
+            <a:pPr marL="0" indent="0" algn="ctr">
               <a:buNone/>
             </a:pPr>
             <a:r>
@@ -5058,6 +4962,7 @@
         <a:solidFill>
           <a:srgbClr val="FFFFFF"/>
         </a:solidFill>
+        <a:effectLst/>
       </p:bgPr>
     </p:bg>
     <p:spTree>
@@ -5098,6 +5003,13 @@
             <a:prstDash val="solid"/>
           </a:ln>
         </p:spPr>
+        <p:txBody>
+          <a:bodyPr/>
+          <a:lstStyle/>
+          <a:p>
+            <a:endParaRPr lang="en-US"/>
+          </a:p>
+        </p:txBody>
       </p:sp>
       <p:sp>
         <p:nvSpPr>
@@ -5123,6 +5035,13 @@
             <a:prstDash val="solid"/>
           </a:ln>
         </p:spPr>
+        <p:txBody>
+          <a:bodyPr/>
+          <a:lstStyle/>
+          <a:p>
+            <a:endParaRPr lang="en-US"/>
+          </a:p>
+        </p:txBody>
       </p:sp>
       <p:sp>
         <p:nvSpPr>
@@ -5145,7 +5064,7 @@
           <a:bodyPr wrap="square" lIns="0" tIns="0" rIns="0" bIns="0" rtlCol="0" anchor="ctr"/>
           <a:lstStyle/>
           <a:p>
-            <a:pPr indent="0" marL="0">
+            <a:pPr marL="0" indent="0">
               <a:buNone/>
             </a:pPr>
             <a:r>
@@ -5184,7 +5103,7 @@
           <a:bodyPr wrap="square" lIns="0" tIns="0" rIns="0" bIns="0" rtlCol="0" anchor="ctr"/>
           <a:lstStyle/>
           <a:p>
-            <a:pPr algn="r" indent="0" marL="0">
+            <a:pPr marL="0" indent="0" algn="r">
               <a:buNone/>
             </a:pPr>
             <a:r>
@@ -5223,7 +5142,7 @@
           <a:bodyPr wrap="square" lIns="0" tIns="0" rIns="0" bIns="0" rtlCol="0" anchor="ctr"/>
           <a:lstStyle/>
           <a:p>
-            <a:pPr indent="0" marL="0">
+            <a:pPr marL="0" indent="0">
               <a:buNone/>
             </a:pPr>
             <a:r>
@@ -5262,7 +5181,7 @@
           <a:bodyPr wrap="square" lIns="50800" tIns="50800" rIns="50800" bIns="50800" rtlCol="0" anchor="t"/>
           <a:lstStyle/>
           <a:p>
-            <a:pPr indent="0" marL="0">
+            <a:pPr marL="0" indent="0">
               <a:buNone/>
             </a:pPr>
             <a:r>
@@ -5279,13 +5198,13 @@
             <a:endParaRPr lang="en-US" sz="1800" dirty="0"/>
           </a:p>
           <a:p>
-            <a:pPr indent="0" marL="0">
+            <a:pPr marL="0" indent="0">
               <a:buNone/>
             </a:pPr>
             <a:endParaRPr lang="en-US" sz="1800" dirty="0"/>
           </a:p>
           <a:p>
-            <a:pPr indent="0" marL="0">
+            <a:pPr marL="0" indent="0">
               <a:buNone/>
             </a:pPr>
             <a:r>
@@ -5302,13 +5221,13 @@
             <a:endParaRPr lang="en-US" sz="1800" dirty="0"/>
           </a:p>
           <a:p>
-            <a:pPr indent="0" marL="0">
+            <a:pPr marL="0" indent="0">
               <a:buNone/>
             </a:pPr>
             <a:endParaRPr lang="en-US" sz="1800" dirty="0"/>
           </a:p>
           <a:p>
-            <a:pPr indent="0" marL="0">
+            <a:pPr marL="0" indent="0">
               <a:buNone/>
             </a:pPr>
             <a:r>
@@ -5325,13 +5244,13 @@
             <a:endParaRPr lang="en-US" sz="1800" dirty="0"/>
           </a:p>
           <a:p>
-            <a:pPr indent="0" marL="0">
+            <a:pPr marL="0" indent="0">
               <a:buNone/>
             </a:pPr>
             <a:endParaRPr lang="en-US" sz="1800" dirty="0"/>
           </a:p>
           <a:p>
-            <a:pPr indent="0" marL="0">
+            <a:pPr marL="0" indent="0">
               <a:buNone/>
             </a:pPr>
             <a:r>
@@ -5370,7 +5289,7 @@
           <a:bodyPr wrap="square" lIns="0" tIns="0" rIns="0" bIns="0" rtlCol="0" anchor="ctr"/>
           <a:lstStyle/>
           <a:p>
-            <a:pPr algn="ctr" indent="0" marL="0">
+            <a:pPr marL="0" indent="0" algn="ctr">
               <a:buNone/>
             </a:pPr>
             <a:r>
@@ -5404,6 +5323,7 @@
         <a:solidFill>
           <a:srgbClr val="FFFFFF"/>
         </a:solidFill>
+        <a:effectLst/>
       </p:bgPr>
     </p:bg>
     <p:spTree>
@@ -5444,6 +5364,13 @@
             <a:prstDash val="solid"/>
           </a:ln>
         </p:spPr>
+        <p:txBody>
+          <a:bodyPr/>
+          <a:lstStyle/>
+          <a:p>
+            <a:endParaRPr lang="en-US"/>
+          </a:p>
+        </p:txBody>
       </p:sp>
       <p:sp>
         <p:nvSpPr>
@@ -5469,6 +5396,13 @@
             <a:prstDash val="solid"/>
           </a:ln>
         </p:spPr>
+        <p:txBody>
+          <a:bodyPr/>
+          <a:lstStyle/>
+          <a:p>
+            <a:endParaRPr lang="en-US"/>
+          </a:p>
+        </p:txBody>
       </p:sp>
       <p:sp>
         <p:nvSpPr>
@@ -5491,7 +5425,7 @@
           <a:bodyPr wrap="square" lIns="0" tIns="0" rIns="0" bIns="0" rtlCol="0" anchor="ctr"/>
           <a:lstStyle/>
           <a:p>
-            <a:pPr indent="0" marL="0">
+            <a:pPr marL="0" indent="0">
               <a:buNone/>
             </a:pPr>
             <a:r>
@@ -5530,7 +5464,7 @@
           <a:bodyPr wrap="square" lIns="0" tIns="0" rIns="0" bIns="0" rtlCol="0" anchor="ctr"/>
           <a:lstStyle/>
           <a:p>
-            <a:pPr algn="r" indent="0" marL="0">
+            <a:pPr marL="0" indent="0" algn="r">
               <a:buNone/>
             </a:pPr>
             <a:r>
@@ -5569,7 +5503,7 @@
           <a:bodyPr wrap="square" lIns="0" tIns="0" rIns="0" bIns="0" rtlCol="0" anchor="ctr"/>
           <a:lstStyle/>
           <a:p>
-            <a:pPr indent="0" marL="0">
+            <a:pPr marL="0" indent="0">
               <a:buNone/>
             </a:pPr>
             <a:r>
@@ -5608,7 +5542,7 @@
           <a:bodyPr wrap="square" lIns="50800" tIns="50800" rIns="50800" bIns="50800" rtlCol="0" anchor="t"/>
           <a:lstStyle/>
           <a:p>
-            <a:pPr indent="0" marL="0">
+            <a:pPr marL="0" indent="0">
               <a:buNone/>
             </a:pPr>
             <a:r>
@@ -5625,13 +5559,13 @@
             <a:endParaRPr lang="en-US" sz="1800" dirty="0"/>
           </a:p>
           <a:p>
-            <a:pPr indent="0" marL="0">
+            <a:pPr marL="0" indent="0">
               <a:buNone/>
             </a:pPr>
             <a:endParaRPr lang="en-US" sz="1800" dirty="0"/>
           </a:p>
           <a:p>
-            <a:pPr indent="0" marL="0">
+            <a:pPr marL="0" indent="0">
               <a:buNone/>
             </a:pPr>
             <a:r>
@@ -5648,13 +5582,13 @@
             <a:endParaRPr lang="en-US" sz="1800" dirty="0"/>
           </a:p>
           <a:p>
-            <a:pPr indent="0" marL="0">
+            <a:pPr marL="0" indent="0">
               <a:buNone/>
             </a:pPr>
             <a:endParaRPr lang="en-US" sz="1800" dirty="0"/>
           </a:p>
           <a:p>
-            <a:pPr indent="0" marL="0">
+            <a:pPr marL="0" indent="0">
               <a:buNone/>
             </a:pPr>
             <a:r>
@@ -5671,13 +5605,13 @@
             <a:endParaRPr lang="en-US" sz="1800" dirty="0"/>
           </a:p>
           <a:p>
-            <a:pPr indent="0" marL="0">
+            <a:pPr marL="0" indent="0">
               <a:buNone/>
             </a:pPr>
             <a:endParaRPr lang="en-US" sz="1800" dirty="0"/>
           </a:p>
           <a:p>
-            <a:pPr indent="0" marL="0">
+            <a:pPr marL="0" indent="0">
               <a:buNone/>
             </a:pPr>
             <a:r>
@@ -5716,7 +5650,7 @@
           <a:bodyPr wrap="square" lIns="0" tIns="0" rIns="0" bIns="0" rtlCol="0" anchor="ctr"/>
           <a:lstStyle/>
           <a:p>
-            <a:pPr algn="ctr" indent="0" marL="0">
+            <a:pPr marL="0" indent="0" algn="ctr">
               <a:buNone/>
             </a:pPr>
             <a:r>
@@ -5750,6 +5684,7 @@
         <a:solidFill>
           <a:srgbClr val="FFFFFF"/>
         </a:solidFill>
+        <a:effectLst/>
       </p:bgPr>
     </p:bg>
     <p:spTree>
@@ -5790,6 +5725,13 @@
             <a:prstDash val="solid"/>
           </a:ln>
         </p:spPr>
+        <p:txBody>
+          <a:bodyPr/>
+          <a:lstStyle/>
+          <a:p>
+            <a:endParaRPr lang="en-US"/>
+          </a:p>
+        </p:txBody>
       </p:sp>
       <p:sp>
         <p:nvSpPr>
@@ -5815,6 +5757,13 @@
             <a:prstDash val="solid"/>
           </a:ln>
         </p:spPr>
+        <p:txBody>
+          <a:bodyPr/>
+          <a:lstStyle/>
+          <a:p>
+            <a:endParaRPr lang="en-US"/>
+          </a:p>
+        </p:txBody>
       </p:sp>
       <p:sp>
         <p:nvSpPr>
@@ -5837,7 +5786,7 @@
           <a:bodyPr wrap="square" lIns="0" tIns="0" rIns="0" bIns="0" rtlCol="0" anchor="ctr"/>
           <a:lstStyle/>
           <a:p>
-            <a:pPr indent="0" marL="0">
+            <a:pPr marL="0" indent="0">
               <a:buNone/>
             </a:pPr>
             <a:r>
@@ -5876,7 +5825,7 @@
           <a:bodyPr wrap="square" lIns="0" tIns="0" rIns="0" bIns="0" rtlCol="0" anchor="ctr"/>
           <a:lstStyle/>
           <a:p>
-            <a:pPr algn="r" indent="0" marL="0">
+            <a:pPr marL="0" indent="0" algn="r">
               <a:buNone/>
             </a:pPr>
             <a:r>
@@ -5915,7 +5864,7 @@
           <a:bodyPr wrap="square" lIns="0" tIns="0" rIns="0" bIns="0" rtlCol="0" anchor="ctr"/>
           <a:lstStyle/>
           <a:p>
-            <a:pPr indent="0" marL="0">
+            <a:pPr marL="0" indent="0">
               <a:buNone/>
             </a:pPr>
             <a:r>
@@ -5954,7 +5903,7 @@
           <a:bodyPr wrap="square" lIns="50800" tIns="50800" rIns="50800" bIns="50800" rtlCol="0" anchor="t"/>
           <a:lstStyle/>
           <a:p>
-            <a:pPr indent="0" marL="0">
+            <a:pPr marL="0" indent="0">
               <a:buNone/>
             </a:pPr>
             <a:r>
@@ -5971,13 +5920,13 @@
             <a:endParaRPr lang="en-US" sz="1800" dirty="0"/>
           </a:p>
           <a:p>
-            <a:pPr indent="0" marL="0">
+            <a:pPr marL="0" indent="0">
               <a:buNone/>
             </a:pPr>
             <a:endParaRPr lang="en-US" sz="1800" dirty="0"/>
           </a:p>
           <a:p>
-            <a:pPr indent="0" marL="0">
+            <a:pPr marL="0" indent="0">
               <a:buNone/>
             </a:pPr>
             <a:r>
@@ -5994,13 +5943,13 @@
             <a:endParaRPr lang="en-US" sz="1800" dirty="0"/>
           </a:p>
           <a:p>
-            <a:pPr indent="0" marL="0">
+            <a:pPr marL="0" indent="0">
               <a:buNone/>
             </a:pPr>
             <a:endParaRPr lang="en-US" sz="1800" dirty="0"/>
           </a:p>
           <a:p>
-            <a:pPr indent="0" marL="0">
+            <a:pPr marL="0" indent="0">
               <a:buNone/>
             </a:pPr>
             <a:r>
@@ -6017,13 +5966,13 @@
             <a:endParaRPr lang="en-US" sz="1800" dirty="0"/>
           </a:p>
           <a:p>
-            <a:pPr indent="0" marL="0">
+            <a:pPr marL="0" indent="0">
               <a:buNone/>
             </a:pPr>
             <a:endParaRPr lang="en-US" sz="1800" dirty="0"/>
           </a:p>
           <a:p>
-            <a:pPr indent="0" marL="0">
+            <a:pPr marL="0" indent="0">
               <a:buNone/>
             </a:pPr>
             <a:r>
@@ -6062,7 +6011,7 @@
           <a:bodyPr wrap="square" lIns="0" tIns="0" rIns="0" bIns="0" rtlCol="0" anchor="ctr"/>
           <a:lstStyle/>
           <a:p>
-            <a:pPr algn="ctr" indent="0" marL="0">
+            <a:pPr marL="0" indent="0" algn="ctr">
               <a:buNone/>
             </a:pPr>
             <a:r>
@@ -6096,6 +6045,7 @@
         <a:solidFill>
           <a:srgbClr val="FFFFFF"/>
         </a:solidFill>
+        <a:effectLst/>
       </p:bgPr>
     </p:bg>
     <p:spTree>
@@ -6136,6 +6086,13 @@
             <a:prstDash val="solid"/>
           </a:ln>
         </p:spPr>
+        <p:txBody>
+          <a:bodyPr/>
+          <a:lstStyle/>
+          <a:p>
+            <a:endParaRPr lang="en-US"/>
+          </a:p>
+        </p:txBody>
       </p:sp>
       <p:sp>
         <p:nvSpPr>
@@ -6161,6 +6118,13 @@
             <a:prstDash val="solid"/>
           </a:ln>
         </p:spPr>
+        <p:txBody>
+          <a:bodyPr/>
+          <a:lstStyle/>
+          <a:p>
+            <a:endParaRPr lang="en-US"/>
+          </a:p>
+        </p:txBody>
       </p:sp>
       <p:sp>
         <p:nvSpPr>
@@ -6183,7 +6147,7 @@
           <a:bodyPr wrap="square" lIns="0" tIns="0" rIns="0" bIns="0" rtlCol="0" anchor="ctr"/>
           <a:lstStyle/>
           <a:p>
-            <a:pPr indent="0" marL="0">
+            <a:pPr marL="0" indent="0">
               <a:buNone/>
             </a:pPr>
             <a:r>
@@ -6222,7 +6186,7 @@
           <a:bodyPr wrap="square" lIns="0" tIns="0" rIns="0" bIns="0" rtlCol="0" anchor="ctr"/>
           <a:lstStyle/>
           <a:p>
-            <a:pPr algn="r" indent="0" marL="0">
+            <a:pPr marL="0" indent="0" algn="r">
               <a:buNone/>
             </a:pPr>
             <a:r>
@@ -6261,7 +6225,7 @@
           <a:bodyPr wrap="square" lIns="0" tIns="0" rIns="0" bIns="0" rtlCol="0" anchor="ctr"/>
           <a:lstStyle/>
           <a:p>
-            <a:pPr indent="0" marL="0">
+            <a:pPr marL="0" indent="0">
               <a:buNone/>
             </a:pPr>
             <a:r>
@@ -6300,7 +6264,7 @@
           <a:bodyPr wrap="square" lIns="50800" tIns="50800" rIns="50800" bIns="50800" rtlCol="0" anchor="t"/>
           <a:lstStyle/>
           <a:p>
-            <a:pPr indent="0" marL="0">
+            <a:pPr marL="0" indent="0">
               <a:buNone/>
             </a:pPr>
             <a:r>
@@ -6317,13 +6281,13 @@
             <a:endParaRPr lang="en-US" sz="1800" dirty="0"/>
           </a:p>
           <a:p>
-            <a:pPr indent="0" marL="0">
+            <a:pPr marL="0" indent="0">
               <a:buNone/>
             </a:pPr>
             <a:endParaRPr lang="en-US" sz="1800" dirty="0"/>
           </a:p>
           <a:p>
-            <a:pPr indent="0" marL="0">
+            <a:pPr marL="0" indent="0">
               <a:buNone/>
             </a:pPr>
             <a:r>
@@ -6340,13 +6304,13 @@
             <a:endParaRPr lang="en-US" sz="1800" dirty="0"/>
           </a:p>
           <a:p>
-            <a:pPr indent="0" marL="0">
+            <a:pPr marL="0" indent="0">
               <a:buNone/>
             </a:pPr>
             <a:endParaRPr lang="en-US" sz="1800" dirty="0"/>
           </a:p>
           <a:p>
-            <a:pPr indent="0" marL="0">
+            <a:pPr marL="0" indent="0">
               <a:buNone/>
             </a:pPr>
             <a:r>
@@ -6363,13 +6327,13 @@
             <a:endParaRPr lang="en-US" sz="1800" dirty="0"/>
           </a:p>
           <a:p>
-            <a:pPr indent="0" marL="0">
+            <a:pPr marL="0" indent="0">
               <a:buNone/>
             </a:pPr>
             <a:endParaRPr lang="en-US" sz="1800" dirty="0"/>
           </a:p>
           <a:p>
-            <a:pPr indent="0" marL="0">
+            <a:pPr marL="0" indent="0">
               <a:buNone/>
             </a:pPr>
             <a:r>
@@ -6408,7 +6372,7 @@
           <a:bodyPr wrap="square" lIns="0" tIns="0" rIns="0" bIns="0" rtlCol="0" anchor="ctr"/>
           <a:lstStyle/>
           <a:p>
-            <a:pPr algn="ctr" indent="0" marL="0">
+            <a:pPr marL="0" indent="0" algn="ctr">
               <a:buNone/>
             </a:pPr>
             <a:r>
@@ -6442,6 +6406,7 @@
         <a:solidFill>
           <a:srgbClr val="FFFFFF"/>
         </a:solidFill>
+        <a:effectLst/>
       </p:bgPr>
     </p:bg>
     <p:spTree>
@@ -6482,6 +6447,13 @@
             <a:prstDash val="solid"/>
           </a:ln>
         </p:spPr>
+        <p:txBody>
+          <a:bodyPr/>
+          <a:lstStyle/>
+          <a:p>
+            <a:endParaRPr lang="en-US"/>
+          </a:p>
+        </p:txBody>
       </p:sp>
       <p:sp>
         <p:nvSpPr>
@@ -6507,6 +6479,13 @@
             <a:prstDash val="solid"/>
           </a:ln>
         </p:spPr>
+        <p:txBody>
+          <a:bodyPr/>
+          <a:lstStyle/>
+          <a:p>
+            <a:endParaRPr lang="en-US"/>
+          </a:p>
+        </p:txBody>
       </p:sp>
       <p:sp>
         <p:nvSpPr>
@@ -6529,7 +6508,7 @@
           <a:bodyPr wrap="square" lIns="0" tIns="0" rIns="0" bIns="0" rtlCol="0" anchor="ctr"/>
           <a:lstStyle/>
           <a:p>
-            <a:pPr indent="0" marL="0">
+            <a:pPr marL="0" indent="0">
               <a:buNone/>
             </a:pPr>
             <a:r>
@@ -6568,7 +6547,7 @@
           <a:bodyPr wrap="square" lIns="0" tIns="0" rIns="0" bIns="0" rtlCol="0" anchor="ctr"/>
           <a:lstStyle/>
           <a:p>
-            <a:pPr algn="r" indent="0" marL="0">
+            <a:pPr marL="0" indent="0" algn="r">
               <a:buNone/>
             </a:pPr>
             <a:r>
@@ -6607,7 +6586,7 @@
           <a:bodyPr wrap="square" lIns="0" tIns="0" rIns="0" bIns="0" rtlCol="0" anchor="ctr"/>
           <a:lstStyle/>
           <a:p>
-            <a:pPr indent="0" marL="0">
+            <a:pPr marL="0" indent="0">
               <a:buNone/>
             </a:pPr>
             <a:r>
@@ -6646,7 +6625,7 @@
           <a:bodyPr wrap="square" lIns="50800" tIns="50800" rIns="50800" bIns="50800" rtlCol="0" anchor="t"/>
           <a:lstStyle/>
           <a:p>
-            <a:pPr indent="0" marL="0">
+            <a:pPr marL="0" indent="0">
               <a:buNone/>
             </a:pPr>
             <a:r>
@@ -6663,13 +6642,13 @@
             <a:endParaRPr lang="en-US" sz="1800" dirty="0"/>
           </a:p>
           <a:p>
-            <a:pPr indent="0" marL="0">
+            <a:pPr marL="0" indent="0">
               <a:buNone/>
             </a:pPr>
             <a:endParaRPr lang="en-US" sz="1800" dirty="0"/>
           </a:p>
           <a:p>
-            <a:pPr indent="0" marL="0">
+            <a:pPr marL="0" indent="0">
               <a:buNone/>
             </a:pPr>
             <a:r>
@@ -6686,13 +6665,13 @@
             <a:endParaRPr lang="en-US" sz="1800" dirty="0"/>
           </a:p>
           <a:p>
-            <a:pPr indent="0" marL="0">
+            <a:pPr marL="0" indent="0">
               <a:buNone/>
             </a:pPr>
             <a:endParaRPr lang="en-US" sz="1800" dirty="0"/>
           </a:p>
           <a:p>
-            <a:pPr indent="0" marL="0">
+            <a:pPr marL="0" indent="0">
               <a:buNone/>
             </a:pPr>
             <a:r>
@@ -6709,13 +6688,13 @@
             <a:endParaRPr lang="en-US" sz="1800" dirty="0"/>
           </a:p>
           <a:p>
-            <a:pPr indent="0" marL="0">
+            <a:pPr marL="0" indent="0">
               <a:buNone/>
             </a:pPr>
             <a:endParaRPr lang="en-US" sz="1800" dirty="0"/>
           </a:p>
           <a:p>
-            <a:pPr indent="0" marL="0">
+            <a:pPr marL="0" indent="0">
               <a:buNone/>
             </a:pPr>
             <a:r>
@@ -6754,7 +6733,7 @@
           <a:bodyPr wrap="square" lIns="0" tIns="0" rIns="0" bIns="0" rtlCol="0" anchor="ctr"/>
           <a:lstStyle/>
           <a:p>
-            <a:pPr algn="ctr" indent="0" marL="0">
+            <a:pPr marL="0" indent="0" algn="ctr">
               <a:buNone/>
             </a:pPr>
             <a:r>
@@ -6788,6 +6767,7 @@
         <a:solidFill>
           <a:srgbClr val="FFFFFF"/>
         </a:solidFill>
+        <a:effectLst/>
       </p:bgPr>
     </p:bg>
     <p:spTree>
@@ -6828,6 +6808,13 @@
             <a:prstDash val="solid"/>
           </a:ln>
         </p:spPr>
+        <p:txBody>
+          <a:bodyPr/>
+          <a:lstStyle/>
+          <a:p>
+            <a:endParaRPr lang="en-US"/>
+          </a:p>
+        </p:txBody>
       </p:sp>
       <p:sp>
         <p:nvSpPr>
@@ -6853,6 +6840,13 @@
             <a:prstDash val="solid"/>
           </a:ln>
         </p:spPr>
+        <p:txBody>
+          <a:bodyPr/>
+          <a:lstStyle/>
+          <a:p>
+            <a:endParaRPr lang="en-US"/>
+          </a:p>
+        </p:txBody>
       </p:sp>
       <p:sp>
         <p:nvSpPr>
@@ -6875,7 +6869,7 @@
           <a:bodyPr wrap="square" lIns="0" tIns="0" rIns="0" bIns="0" rtlCol="0" anchor="ctr"/>
           <a:lstStyle/>
           <a:p>
-            <a:pPr indent="0" marL="0">
+            <a:pPr marL="0" indent="0">
               <a:buNone/>
             </a:pPr>
             <a:r>
@@ -6914,7 +6908,7 @@
           <a:bodyPr wrap="square" lIns="0" tIns="0" rIns="0" bIns="0" rtlCol="0" anchor="ctr"/>
           <a:lstStyle/>
           <a:p>
-            <a:pPr algn="r" indent="0" marL="0">
+            <a:pPr marL="0" indent="0" algn="r">
               <a:buNone/>
             </a:pPr>
             <a:r>
@@ -6953,7 +6947,7 @@
           <a:bodyPr wrap="square" lIns="0" tIns="0" rIns="0" bIns="0" rtlCol="0" anchor="ctr"/>
           <a:lstStyle/>
           <a:p>
-            <a:pPr indent="0" marL="0">
+            <a:pPr marL="0" indent="0">
               <a:buNone/>
             </a:pPr>
             <a:r>
@@ -6994,8 +6988,20 @@
             <a:tbl>
               <a:tblPr/>
               <a:tblGrid>
-                <a:gridCol w="2926080"/>
-                <a:gridCol w="8046720"/>
+                <a:gridCol w="2926080">
+                  <a:extLst>
+                    <a:ext uri="{9D8B030D-6E8A-4147-A177-3AD203B41FA5}">
+                      <a16:colId xmlns:a16="http://schemas.microsoft.com/office/drawing/2014/main" val="20000"/>
+                    </a:ext>
+                  </a:extLst>
+                </a:gridCol>
+                <a:gridCol w="8046720">
+                  <a:extLst>
+                    <a:ext uri="{9D8B030D-6E8A-4147-A177-3AD203B41FA5}">
+                      <a16:colId xmlns:a16="http://schemas.microsoft.com/office/drawing/2014/main" val="20001"/>
+                    </a:ext>
+                  </a:extLst>
+                </a:gridCol>
               </a:tblGrid>
               <a:tr h="1005840">
                 <a:tc>
@@ -7003,7 +7009,7 @@
                     <a:bodyPr/>
                     <a:lstStyle/>
                     <a:p>
-                      <a:pPr algn="ctr" indent="0" marL="0">
+                      <a:pPr marL="0" indent="0" algn="ctr">
                         <a:buNone/>
                       </a:pPr>
                       <a:r>
@@ -7024,7 +7030,7 @@
                       </a:endParaRPr>
                     </a:p>
                   </a:txBody>
-                  <a:tcPr marL="91440" marR="91440" marT="45720" marB="45720" anchor="ctr">
+                  <a:tcPr anchor="ctr">
                     <a:lnL w="25400" cap="flat" cmpd="sng" algn="ctr">
                       <a:solidFill>
                         <a:srgbClr val="FFFFFF"/>
@@ -7071,7 +7077,7 @@
                     <a:bodyPr/>
                     <a:lstStyle/>
                     <a:p>
-                      <a:pPr algn="ctr" indent="0" marL="0">
+                      <a:pPr marL="0" indent="0" algn="ctr">
                         <a:buNone/>
                       </a:pPr>
                       <a:r>
@@ -7092,7 +7098,7 @@
                       </a:endParaRPr>
                     </a:p>
                   </a:txBody>
-                  <a:tcPr marL="91440" marR="91440" marT="45720" marB="45720" anchor="ctr">
+                  <a:tcPr anchor="ctr">
                     <a:lnL w="25400" cap="flat" cmpd="sng" algn="ctr">
                       <a:solidFill>
                         <a:srgbClr val="FFFFFF"/>
@@ -7134,6 +7140,11 @@
                     </a:solidFill>
                   </a:tcPr>
                 </a:tc>
+                <a:extLst>
+                  <a:ext uri="{0D108BD9-81ED-4DB2-BD59-A6C34878D82A}">
+                    <a16:rowId xmlns:a16="http://schemas.microsoft.com/office/drawing/2014/main" val="10000"/>
+                  </a:ext>
+                </a:extLst>
               </a:tr>
               <a:tr h="1005840">
                 <a:tc>
@@ -7141,7 +7152,7 @@
                     <a:bodyPr/>
                     <a:lstStyle/>
                     <a:p>
-                      <a:pPr algn="ctr" indent="0" marL="0">
+                      <a:pPr marL="0" indent="0" algn="ctr">
                         <a:buNone/>
                       </a:pPr>
                       <a:r>
@@ -7162,7 +7173,7 @@
                       </a:endParaRPr>
                     </a:p>
                     <a:p>
-                      <a:pPr algn="ctr" indent="0" marL="0">
+                      <a:pPr marL="0" indent="0" algn="ctr">
                         <a:buNone/>
                       </a:pPr>
                       <a:r>
@@ -7183,7 +7194,7 @@
                       </a:endParaRPr>
                     </a:p>
                   </a:txBody>
-                  <a:tcPr marL="91440" marR="91440" marT="45720" marB="45720" anchor="ctr">
+                  <a:tcPr anchor="ctr">
                     <a:lnL w="25400" cap="flat" cmpd="sng" algn="ctr">
                       <a:solidFill>
                         <a:srgbClr val="FFFFFF"/>
@@ -7230,7 +7241,7 @@
                     <a:bodyPr/>
                     <a:lstStyle/>
                     <a:p>
-                      <a:pPr algn="l" indent="0" marL="0">
+                      <a:pPr marL="0" indent="0" algn="l">
                         <a:buNone/>
                       </a:pPr>
                       <a:r>
@@ -7251,7 +7262,7 @@
                       </a:endParaRPr>
                     </a:p>
                   </a:txBody>
-                  <a:tcPr marL="91440" marR="91440" marT="45720" marB="45720" anchor="ctr">
+                  <a:tcPr anchor="ctr">
                     <a:lnL w="25400" cap="flat" cmpd="sng" algn="ctr">
                       <a:solidFill>
                         <a:srgbClr val="FFFFFF"/>
@@ -7293,6 +7304,11 @@
                     </a:solidFill>
                   </a:tcPr>
                 </a:tc>
+                <a:extLst>
+                  <a:ext uri="{0D108BD9-81ED-4DB2-BD59-A6C34878D82A}">
+                    <a16:rowId xmlns:a16="http://schemas.microsoft.com/office/drawing/2014/main" val="10001"/>
+                  </a:ext>
+                </a:extLst>
               </a:tr>
               <a:tr h="1005840">
                 <a:tc>
@@ -7300,7 +7316,7 @@
                     <a:bodyPr/>
                     <a:lstStyle/>
                     <a:p>
-                      <a:pPr algn="ctr" indent="0" marL="0">
+                      <a:pPr marL="0" indent="0" algn="ctr">
                         <a:buNone/>
                       </a:pPr>
                       <a:r>
@@ -7321,7 +7337,7 @@
                       </a:endParaRPr>
                     </a:p>
                     <a:p>
-                      <a:pPr algn="ctr" indent="0" marL="0">
+                      <a:pPr marL="0" indent="0" algn="ctr">
                         <a:buNone/>
                       </a:pPr>
                       <a:r>
@@ -7342,7 +7358,7 @@
                       </a:endParaRPr>
                     </a:p>
                   </a:txBody>
-                  <a:tcPr marL="91440" marR="91440" marT="45720" marB="45720" anchor="ctr">
+                  <a:tcPr anchor="ctr">
                     <a:lnL w="25400" cap="flat" cmpd="sng" algn="ctr">
                       <a:solidFill>
                         <a:srgbClr val="FFFFFF"/>
@@ -7389,7 +7405,7 @@
                     <a:bodyPr/>
                     <a:lstStyle/>
                     <a:p>
-                      <a:pPr algn="l" indent="0" marL="0">
+                      <a:pPr marL="0" indent="0" algn="l">
                         <a:buNone/>
                       </a:pPr>
                       <a:r>
@@ -7410,7 +7426,7 @@
                       </a:endParaRPr>
                     </a:p>
                   </a:txBody>
-                  <a:tcPr marL="91440" marR="91440" marT="45720" marB="45720" anchor="ctr">
+                  <a:tcPr anchor="ctr">
                     <a:lnL w="25400" cap="flat" cmpd="sng" algn="ctr">
                       <a:solidFill>
                         <a:srgbClr val="FFFFFF"/>
@@ -7452,6 +7468,11 @@
                     </a:solidFill>
                   </a:tcPr>
                 </a:tc>
+                <a:extLst>
+                  <a:ext uri="{0D108BD9-81ED-4DB2-BD59-A6C34878D82A}">
+                    <a16:rowId xmlns:a16="http://schemas.microsoft.com/office/drawing/2014/main" val="10002"/>
+                  </a:ext>
+                </a:extLst>
               </a:tr>
               <a:tr h="1005840">
                 <a:tc>
@@ -7459,7 +7480,7 @@
                     <a:bodyPr/>
                     <a:lstStyle/>
                     <a:p>
-                      <a:pPr algn="ctr" indent="0" marL="0">
+                      <a:pPr marL="0" indent="0" algn="ctr">
                         <a:buNone/>
                       </a:pPr>
                       <a:r>
@@ -7480,7 +7501,7 @@
                       </a:endParaRPr>
                     </a:p>
                     <a:p>
-                      <a:pPr algn="ctr" indent="0" marL="0">
+                      <a:pPr marL="0" indent="0" algn="ctr">
                         <a:buNone/>
                       </a:pPr>
                       <a:r>
@@ -7501,7 +7522,7 @@
                       </a:endParaRPr>
                     </a:p>
                   </a:txBody>
-                  <a:tcPr marL="91440" marR="91440" marT="45720" marB="45720" anchor="ctr">
+                  <a:tcPr anchor="ctr">
                     <a:lnL w="25400" cap="flat" cmpd="sng" algn="ctr">
                       <a:solidFill>
                         <a:srgbClr val="FFFFFF"/>
@@ -7548,7 +7569,7 @@
                     <a:bodyPr/>
                     <a:lstStyle/>
                     <a:p>
-                      <a:pPr algn="l" indent="0" marL="0">
+                      <a:pPr marL="0" indent="0" algn="l">
                         <a:buNone/>
                       </a:pPr>
                       <a:r>
@@ -7569,7 +7590,7 @@
                       </a:endParaRPr>
                     </a:p>
                   </a:txBody>
-                  <a:tcPr marL="91440" marR="91440" marT="45720" marB="45720" anchor="ctr">
+                  <a:tcPr anchor="ctr">
                     <a:lnL w="25400" cap="flat" cmpd="sng" algn="ctr">
                       <a:solidFill>
                         <a:srgbClr val="FFFFFF"/>
@@ -7611,6 +7632,11 @@
                     </a:solidFill>
                   </a:tcPr>
                 </a:tc>
+                <a:extLst>
+                  <a:ext uri="{0D108BD9-81ED-4DB2-BD59-A6C34878D82A}">
+                    <a16:rowId xmlns:a16="http://schemas.microsoft.com/office/drawing/2014/main" val="10003"/>
+                  </a:ext>
+                </a:extLst>
               </a:tr>
             </a:tbl>
           </a:graphicData>
@@ -7637,7 +7663,7 @@
           <a:bodyPr wrap="square" lIns="0" tIns="0" rIns="0" bIns="0" rtlCol="0" anchor="ctr"/>
           <a:lstStyle/>
           <a:p>
-            <a:pPr algn="ctr" indent="0" marL="0">
+            <a:pPr marL="0" indent="0" algn="ctr">
               <a:buNone/>
             </a:pPr>
             <a:r>
@@ -7956,4 +7982,319 @@
     </a:ext>
   </a:extLst>
 </a:theme>
+</file>
+
+<file path=ppt/theme/theme2.xml><?xml version="1.0" encoding="utf-8"?>
+<a:theme xmlns:a="http://schemas.openxmlformats.org/drawingml/2006/main" name="Office Theme">
+  <a:themeElements>
+    <a:clrScheme name="Office">
+      <a:dk1>
+        <a:sysClr val="windowText" lastClr="000000"/>
+      </a:dk1>
+      <a:lt1>
+        <a:sysClr val="window" lastClr="FFFFFF"/>
+      </a:lt1>
+      <a:dk2>
+        <a:srgbClr val="0E2841"/>
+      </a:dk2>
+      <a:lt2>
+        <a:srgbClr val="E8E8E8"/>
+      </a:lt2>
+      <a:accent1>
+        <a:srgbClr val="156082"/>
+      </a:accent1>
+      <a:accent2>
+        <a:srgbClr val="E97132"/>
+      </a:accent2>
+      <a:accent3>
+        <a:srgbClr val="196B24"/>
+      </a:accent3>
+      <a:accent4>
+        <a:srgbClr val="0F9ED5"/>
+      </a:accent4>
+      <a:accent5>
+        <a:srgbClr val="A02B93"/>
+      </a:accent5>
+      <a:accent6>
+        <a:srgbClr val="4EA72E"/>
+      </a:accent6>
+      <a:hlink>
+        <a:srgbClr val="467886"/>
+      </a:hlink>
+      <a:folHlink>
+        <a:srgbClr val="96607D"/>
+      </a:folHlink>
+    </a:clrScheme>
+    <a:fontScheme name="Office">
+      <a:majorFont>
+        <a:latin typeface="Aptos Display" panose="02110004020202020204"/>
+        <a:ea typeface=""/>
+        <a:cs typeface=""/>
+        <a:font script="Jpan" typeface="游ゴシック Light"/>
+        <a:font script="Hang" typeface="맑은 고딕"/>
+        <a:font script="Hans" typeface="等线 Light"/>
+        <a:font script="Hant" typeface="新細明體"/>
+        <a:font script="Arab" typeface="Times New Roman"/>
+        <a:font script="Hebr" typeface="Times New Roman"/>
+        <a:font script="Thai" typeface="Angsana New"/>
+        <a:font script="Ethi" typeface="Nyala"/>
+        <a:font script="Beng" typeface="Vrinda"/>
+        <a:font script="Gujr" typeface="Shruti"/>
+        <a:font script="Khmr" typeface="MoolBoran"/>
+        <a:font script="Knda" typeface="Tunga"/>
+        <a:font script="Guru" typeface="Raavi"/>
+        <a:font script="Cans" typeface="Euphemia"/>
+        <a:font script="Cher" typeface="Plantagenet Cherokee"/>
+        <a:font script="Yiii" typeface="Microsoft Yi Baiti"/>
+        <a:font script="Tibt" typeface="Microsoft Himalaya"/>
+        <a:font script="Thaa" typeface="MV Boli"/>
+        <a:font script="Deva" typeface="Mangal"/>
+        <a:font script="Telu" typeface="Gautami"/>
+        <a:font script="Taml" typeface="Latha"/>
+        <a:font script="Syrc" typeface="Estrangelo Edessa"/>
+        <a:font script="Orya" typeface="Kalinga"/>
+        <a:font script="Mlym" typeface="Kartika"/>
+        <a:font script="Laoo" typeface="DokChampa"/>
+        <a:font script="Sinh" typeface="Iskoola Pota"/>
+        <a:font script="Mong" typeface="Mongolian Baiti"/>
+        <a:font script="Viet" typeface="Times New Roman"/>
+        <a:font script="Uigh" typeface="Microsoft Uighur"/>
+        <a:font script="Geor" typeface="Sylfaen"/>
+        <a:font script="Armn" typeface="Arial"/>
+        <a:font script="Bugi" typeface="Leelawadee UI"/>
+        <a:font script="Bopo" typeface="Microsoft JhengHei"/>
+        <a:font script="Java" typeface="Javanese Text"/>
+        <a:font script="Lisu" typeface="Segoe UI"/>
+        <a:font script="Mymr" typeface="Myanmar Text"/>
+        <a:font script="Nkoo" typeface="Ebrima"/>
+        <a:font script="Olck" typeface="Nirmala UI"/>
+        <a:font script="Osma" typeface="Ebrima"/>
+        <a:font script="Phag" typeface="Phagspa"/>
+        <a:font script="Syrn" typeface="Estrangelo Edessa"/>
+        <a:font script="Syrj" typeface="Estrangelo Edessa"/>
+        <a:font script="Syre" typeface="Estrangelo Edessa"/>
+        <a:font script="Sora" typeface="Nirmala UI"/>
+        <a:font script="Tale" typeface="Microsoft Tai Le"/>
+        <a:font script="Talu" typeface="Microsoft New Tai Lue"/>
+        <a:font script="Tfng" typeface="Ebrima"/>
+      </a:majorFont>
+      <a:minorFont>
+        <a:latin typeface="Aptos" panose="02110004020202020204"/>
+        <a:ea typeface=""/>
+        <a:cs typeface=""/>
+        <a:font script="Jpan" typeface="游ゴシック"/>
+        <a:font script="Hang" typeface="맑은 고딕"/>
+        <a:font script="Hans" typeface="等线"/>
+        <a:font script="Hant" typeface="新細明體"/>
+        <a:font script="Arab" typeface="Arial"/>
+        <a:font script="Hebr" typeface="Arial"/>
+        <a:font script="Thai" typeface="Cordia New"/>
+        <a:font script="Ethi" typeface="Nyala"/>
+        <a:font script="Beng" typeface="Vrinda"/>
+        <a:font script="Gujr" typeface="Shruti"/>
+        <a:font script="Khmr" typeface="DaunPenh"/>
+        <a:font script="Knda" typeface="Tunga"/>
+        <a:font script="Guru" typeface="Raavi"/>
+        <a:font script="Cans" typeface="Euphemia"/>
+        <a:font script="Cher" typeface="Plantagenet Cherokee"/>
+        <a:font script="Yiii" typeface="Microsoft Yi Baiti"/>
+        <a:font script="Tibt" typeface="Microsoft Himalaya"/>
+        <a:font script="Thaa" typeface="MV Boli"/>
+        <a:font script="Deva" typeface="Mangal"/>
+        <a:font script="Telu" typeface="Gautami"/>
+        <a:font script="Taml" typeface="Latha"/>
+        <a:font script="Syrc" typeface="Estrangelo Edessa"/>
+        <a:font script="Orya" typeface="Kalinga"/>
+        <a:font script="Mlym" typeface="Kartika"/>
+        <a:font script="Laoo" typeface="DokChampa"/>
+        <a:font script="Sinh" typeface="Iskoola Pota"/>
+        <a:font script="Mong" typeface="Mongolian Baiti"/>
+        <a:font script="Viet" typeface="Arial"/>
+        <a:font script="Uigh" typeface="Microsoft Uighur"/>
+        <a:font script="Geor" typeface="Sylfaen"/>
+        <a:font script="Armn" typeface="Arial"/>
+        <a:font script="Bugi" typeface="Leelawadee UI"/>
+        <a:font script="Bopo" typeface="Microsoft JhengHei"/>
+        <a:font script="Java" typeface="Javanese Text"/>
+        <a:font script="Lisu" typeface="Segoe UI"/>
+        <a:font script="Mymr" typeface="Myanmar Text"/>
+        <a:font script="Nkoo" typeface="Ebrima"/>
+        <a:font script="Olck" typeface="Nirmala UI"/>
+        <a:font script="Osma" typeface="Ebrima"/>
+        <a:font script="Phag" typeface="Phagspa"/>
+        <a:font script="Syrn" typeface="Estrangelo Edessa"/>
+        <a:font script="Syrj" typeface="Estrangelo Edessa"/>
+        <a:font script="Syre" typeface="Estrangelo Edessa"/>
+        <a:font script="Sora" typeface="Nirmala UI"/>
+        <a:font script="Tale" typeface="Microsoft Tai Le"/>
+        <a:font script="Talu" typeface="Microsoft New Tai Lue"/>
+        <a:font script="Tfng" typeface="Ebrima"/>
+      </a:minorFont>
+    </a:fontScheme>
+    <a:fmtScheme name="Office">
+      <a:fillStyleLst>
+        <a:solidFill>
+          <a:schemeClr val="phClr"/>
+        </a:solidFill>
+        <a:gradFill rotWithShape="1">
+          <a:gsLst>
+            <a:gs pos="0">
+              <a:schemeClr val="phClr">
+                <a:lumMod val="110000"/>
+                <a:satMod val="105000"/>
+                <a:tint val="67000"/>
+              </a:schemeClr>
+            </a:gs>
+            <a:gs pos="50000">
+              <a:schemeClr val="phClr">
+                <a:lumMod val="105000"/>
+                <a:satMod val="103000"/>
+                <a:tint val="73000"/>
+              </a:schemeClr>
+            </a:gs>
+            <a:gs pos="100000">
+              <a:schemeClr val="phClr">
+                <a:lumMod val="105000"/>
+                <a:satMod val="109000"/>
+                <a:tint val="81000"/>
+              </a:schemeClr>
+            </a:gs>
+          </a:gsLst>
+          <a:lin ang="5400000" scaled="0"/>
+        </a:gradFill>
+        <a:gradFill rotWithShape="1">
+          <a:gsLst>
+            <a:gs pos="0">
+              <a:schemeClr val="phClr">
+                <a:satMod val="103000"/>
+                <a:lumMod val="102000"/>
+                <a:tint val="94000"/>
+              </a:schemeClr>
+            </a:gs>
+            <a:gs pos="50000">
+              <a:schemeClr val="phClr">
+                <a:satMod val="110000"/>
+                <a:lumMod val="100000"/>
+                <a:shade val="100000"/>
+              </a:schemeClr>
+            </a:gs>
+            <a:gs pos="100000">
+              <a:schemeClr val="phClr">
+                <a:lumMod val="99000"/>
+                <a:satMod val="120000"/>
+                <a:shade val="78000"/>
+              </a:schemeClr>
+            </a:gs>
+          </a:gsLst>
+          <a:lin ang="5400000" scaled="0"/>
+        </a:gradFill>
+      </a:fillStyleLst>
+      <a:lnStyleLst>
+        <a:ln w="12700" cap="flat" cmpd="sng" algn="ctr">
+          <a:solidFill>
+            <a:schemeClr val="phClr"/>
+          </a:solidFill>
+          <a:prstDash val="solid"/>
+          <a:miter lim="800000"/>
+        </a:ln>
+        <a:ln w="19050" cap="flat" cmpd="sng" algn="ctr">
+          <a:solidFill>
+            <a:schemeClr val="phClr"/>
+          </a:solidFill>
+          <a:prstDash val="solid"/>
+          <a:miter lim="800000"/>
+        </a:ln>
+        <a:ln w="25400" cap="flat" cmpd="sng" algn="ctr">
+          <a:solidFill>
+            <a:schemeClr val="phClr"/>
+          </a:solidFill>
+          <a:prstDash val="solid"/>
+          <a:miter lim="800000"/>
+        </a:ln>
+      </a:lnStyleLst>
+      <a:effectStyleLst>
+        <a:effectStyle>
+          <a:effectLst/>
+        </a:effectStyle>
+        <a:effectStyle>
+          <a:effectLst/>
+        </a:effectStyle>
+        <a:effectStyle>
+          <a:effectLst>
+            <a:outerShdw blurRad="57150" dist="19050" dir="5400000" algn="ctr" rotWithShape="0">
+              <a:srgbClr val="000000">
+                <a:alpha val="63000"/>
+              </a:srgbClr>
+            </a:outerShdw>
+          </a:effectLst>
+        </a:effectStyle>
+      </a:effectStyleLst>
+      <a:bgFillStyleLst>
+        <a:solidFill>
+          <a:schemeClr val="phClr"/>
+        </a:solidFill>
+        <a:solidFill>
+          <a:schemeClr val="phClr">
+            <a:tint val="95000"/>
+            <a:satMod val="170000"/>
+          </a:schemeClr>
+        </a:solidFill>
+        <a:gradFill rotWithShape="1">
+          <a:gsLst>
+            <a:gs pos="0">
+              <a:schemeClr val="phClr">
+                <a:tint val="93000"/>
+                <a:satMod val="150000"/>
+                <a:shade val="98000"/>
+                <a:lumMod val="102000"/>
+              </a:schemeClr>
+            </a:gs>
+            <a:gs pos="50000">
+              <a:schemeClr val="phClr">
+                <a:tint val="98000"/>
+                <a:satMod val="130000"/>
+                <a:shade val="90000"/>
+                <a:lumMod val="103000"/>
+              </a:schemeClr>
+            </a:gs>
+            <a:gs pos="100000">
+              <a:schemeClr val="phClr">
+                <a:shade val="63000"/>
+                <a:satMod val="120000"/>
+              </a:schemeClr>
+            </a:gs>
+          </a:gsLst>
+          <a:lin ang="5400000" scaled="0"/>
+        </a:gradFill>
+      </a:bgFillStyleLst>
+    </a:fmtScheme>
+  </a:themeElements>
+  <a:objectDefaults>
+    <a:lnDef>
+      <a:spPr/>
+      <a:bodyPr/>
+      <a:lstStyle/>
+      <a:style>
+        <a:lnRef idx="2">
+          <a:schemeClr val="accent1"/>
+        </a:lnRef>
+        <a:fillRef idx="0">
+          <a:schemeClr val="accent1"/>
+        </a:fillRef>
+        <a:effectRef idx="1">
+          <a:schemeClr val="accent1"/>
+        </a:effectRef>
+        <a:fontRef idx="minor">
+          <a:schemeClr val="tx1"/>
+        </a:fontRef>
+      </a:style>
+    </a:lnDef>
+  </a:objectDefaults>
+  <a:extraClrSchemeLst/>
+  <a:extLst>
+    <a:ext uri="{05A4C25C-085E-4340-85A3-A5531E510DB2}">
+      <thm15:themeFamily xmlns:thm15="http://schemas.microsoft.com/office/thememl/2012/main" name="Office Theme" id="{2E142A2C-CD16-42D6-873A-C26D2A0506FA}" vid="{1BDDFF52-6CD6-40A5-AB3C-68EB2F1E4D0A}"/>
+    </a:ext>
+  </a:extLst>
+</a:theme>
 </file>